--- a/丹橘知旱-参赛PPT.pptx
+++ b/丹橘知旱-参赛PPT.pptx
@@ -4626,7 +4626,17 @@
                   <a:srgbClr val="1F2D27"/>
                 </a:solidFill>
               </a:rPr>
-              <a:t>●  同一套规则有 Python 独立实现交叉验证</a:t>
+              <a:t>●  与 Python 独立实现由脚本逐日对拍强制等价</a:t>
+            </a:r>
+          </a:p>
+          <a:p>
+            <a:r>
+              <a:rPr sz="1600" b="0">
+                <a:solidFill>
+                  <a:srgbClr val="1F2D27"/>
+                </a:solidFill>
+              </a:rPr>
+              <a:t>     （442 天 + 23 组阈值边界用例）</a:t>
             </a:r>
           </a:p>
         </p:txBody>
@@ -4940,8 +4950,8 @@
         </p:nvSpPr>
         <p:spPr>
           <a:xfrm>
-            <a:off x="640080" y="1645920"/>
-            <a:ext cx="10972800" cy="2103120"/>
+            <a:off x="640080" y="1554480"/>
+            <a:ext cx="10972800" cy="2377440"/>
           </a:xfrm>
           <a:prstGeom prst="rect">
             <a:avLst/>
@@ -4985,7 +4995,7 @@
           </a:p>
           <a:p>
             <a:r>
-              <a:rPr sz="1600">
+              <a:rPr sz="1500">
                 <a:solidFill>
                   <a:srgbClr val="1F2D27"/>
                 </a:solidFill>
@@ -4995,22 +5005,32 @@
           </a:p>
           <a:p>
             <a:r>
-              <a:rPr sz="1600">
+              <a:rPr sz="1500">
                 <a:solidFill>
                   <a:srgbClr val="1F2D27"/>
                 </a:solidFill>
               </a:rPr>
-              <a:t>●  首个『重』级提示 2022-08-04 —— 比峰值提前 3 天，覆盖灾前防护窗口</a:t>
-            </a:r>
-          </a:p>
-          <a:p>
-            <a:r>
-              <a:rPr sz="1600">
+              <a:t>●  首个『重』级提示 2022-08-04（39.2℃）——比峰值提前 3 天；时效归因于单日 ≥39℃ 阈值，不记在连续升级头上</a:t>
+            </a:r>
+          </a:p>
+          <a:p>
+            <a:r>
+              <a:rPr sz="1500">
                 <a:solidFill>
                   <a:srgbClr val="1F2D27"/>
                 </a:solidFill>
               </a:rPr>
-              <a:t>●  页面内置 2022 热害 / 2025 秋汛 / 2021 冬寒潮三个回放场景，可自助复验</a:t>
+              <a:t>●  干旱同期『中』3 天／『重』0 天——十年基线已量化，是命名承诺的最弱环</a:t>
+            </a:r>
+          </a:p>
+          <a:p>
+            <a:r>
+              <a:rPr sz="1500">
+                <a:solidFill>
+                  <a:srgbClr val="1F2D27"/>
+                </a:solidFill>
+              </a:rPr>
+              <a:t>●  可离线复算：输入序列已冻结入库；JS↔Python 逐日对拍 + 边界用例全通过</a:t>
             </a:r>
           </a:p>
         </p:txBody>
@@ -5038,7 +5058,7 @@
           <a:lstStyle/>
           <a:p>
             <a:r>
-              <a:rPr sz="1700" b="0">
+              <a:rPr sz="1600" b="0">
                 <a:solidFill>
                   <a:srgbClr val="1F2D27"/>
                 </a:solidFill>
@@ -5048,32 +5068,42 @@
           </a:p>
           <a:p>
             <a:r>
-              <a:rPr sz="1700" b="0">
+              <a:rPr sz="1600" b="0">
                 <a:solidFill>
                   <a:srgbClr val="1F2D27"/>
                 </a:solidFill>
               </a:rPr>
-              <a:t>●  对象：库区 1—2 家合作社 / 乡镇农技员（30—100 亩）</a:t>
-            </a:r>
-          </a:p>
-          <a:p>
-            <a:r>
-              <a:rPr sz="1700" b="0">
+              <a:t>●  对象：库区 1—2 家合作社 / 乡镇农技员（30—100 亩），现场两次 + 微信回访</a:t>
+            </a:r>
+          </a:p>
+          <a:p>
+            <a:r>
+              <a:rPr sz="1600" b="0">
                 <a:solidFill>
                   <a:srgbClr val="1F2D27"/>
                 </a:solidFill>
               </a:rPr>
-              <a:t>●  指标：建议采纳率 ≥50% ｜ 提示时效提前 ≥1 天 ｜ 满意度 ≥3.8/5 ｜ 续用意愿 ≥80%</a:t>
-            </a:r>
-          </a:p>
-          <a:p>
-            <a:r>
-              <a:rPr sz="1700" b="0">
+              <a:t>●  指标：越冬准备就绪率 ≥60%（越冬季主指标）｜采纳率 ≥50%（中重级不足 5 次则只报案例）</a:t>
+            </a:r>
+          </a:p>
+          <a:p>
+            <a:r>
+              <a:rPr sz="1600" b="0">
                 <a:solidFill>
                   <a:srgbClr val="1F2D27"/>
                 </a:solidFill>
               </a:rPr>
-              <a:t>●  迭代：阈值与物候表每两周校准；高频追问沉淀为规则条目</a:t>
+              <a:t>        提示时效 ≥1 天｜满意度 ≥3.8｜续用意愿 ≥80%；n&lt;10 一律只报分子分母，不报百分比</a:t>
+            </a:r>
+          </a:p>
+          <a:p>
+            <a:r>
+              <a:rPr sz="1600" b="0">
+                <a:solidFill>
+                  <a:srgbClr val="1F2D27"/>
+                </a:solidFill>
+              </a:rPr>
+              <a:t>●  前置：与合作社/农技中心签一页纸《试用与责任约定》，外部性动作先确认才推送</a:t>
             </a:r>
           </a:p>
         </p:txBody>
@@ -5278,7 +5308,7 @@
                   <a:srgbClr val="0E5233"/>
                 </a:solidFill>
               </a:rPr>
-              <a:t>市场可持续</a:t>
+              <a:t>可持续（12 个月，诚实选边）</a:t>
             </a:r>
           </a:p>
         </p:txBody>
@@ -5306,62 +5336,52 @@
           <a:lstStyle/>
           <a:p>
             <a:r>
-              <a:rPr sz="1600" b="0">
+              <a:rPr sz="1500" b="0">
                 <a:solidFill>
                   <a:srgbClr val="1F2D27"/>
                 </a:solidFill>
               </a:rPr>
-              <a:t>●  合作社年费（数百元级/园块）</a:t>
-            </a:r>
-          </a:p>
-          <a:p>
-            <a:r>
-              <a:rPr sz="1600" b="0">
+              <a:t>●  12 个月内收入为 0——已选定赛道不追求收入</a:t>
+            </a:r>
+          </a:p>
+          <a:p>
+            <a:r>
+              <a:rPr sz="1500" b="0">
                 <a:solidFill>
                   <a:srgbClr val="1F2D27"/>
                 </a:solidFill>
               </a:rPr>
-              <a:t>●  气象数据授权运营场景分成</a:t>
-            </a:r>
-          </a:p>
-          <a:p>
-            <a:r>
-              <a:rPr sz="1600" b="0">
+              <a:t>●  定位：低成本公益基础设施 + 开源作品</a:t>
+            </a:r>
+          </a:p>
+          <a:p>
+            <a:r>
+              <a:rPr sz="1500" b="0">
                 <a:solidFill>
                   <a:srgbClr val="1F2D27"/>
                 </a:solidFill>
               </a:rPr>
-              <a:t>     （湖北已发首批授权）</a:t>
-            </a:r>
-          </a:p>
-          <a:p>
-            <a:r>
-              <a:rPr sz="1600" b="0">
+              <a:t>●  机制：赛事奖金／政府专项／基金会</a:t>
+            </a:r>
+          </a:p>
+          <a:p>
+            <a:r>
+              <a:rPr sz="1500" b="0">
                 <a:solidFill>
                   <a:srgbClr val="1F2D27"/>
                 </a:solidFill>
               </a:rPr>
-              <a:t>●  「气象+保险」联动：风险日志作为</a:t>
-            </a:r>
-          </a:p>
-          <a:p>
-            <a:r>
-              <a:rPr sz="1600" b="0">
+              <a:t>     （当前均未申请；个人身份通常无申报资格）</a:t>
+            </a:r>
+          </a:p>
+          <a:p>
+            <a:r>
+              <a:rPr sz="1500" b="0">
                 <a:solidFill>
                   <a:srgbClr val="1F2D27"/>
                 </a:solidFill>
               </a:rPr>
-              <a:t>     投保/理赔辅助凭证</a:t>
-            </a:r>
-          </a:p>
-          <a:p>
-            <a:r>
-              <a:rPr sz="1600" b="0">
-                <a:solidFill>
-                  <a:srgbClr val="1F2D27"/>
-                </a:solidFill>
-              </a:rPr>
-              <a:t>●  小农户基础功能永久免费</a:t>
+              <a:t>●  免费＝现有全部功能 + 无付费墙 + 可自部署</a:t>
             </a:r>
           </a:p>
         </p:txBody>
@@ -5394,7 +5414,7 @@
                   <a:srgbClr val="0E5233"/>
                 </a:solidFill>
               </a:rPr>
-              <a:t>扩展与伦理</a:t>
+              <a:t>扩展与单点风险</a:t>
             </a:r>
           </a:p>
         </p:txBody>
@@ -5422,42 +5442,52 @@
           <a:lstStyle/>
           <a:p>
             <a:r>
-              <a:rPr sz="1600" b="0">
+              <a:rPr sz="1500" b="0">
                 <a:solidFill>
                   <a:srgbClr val="1F2D27"/>
                 </a:solidFill>
               </a:rPr>
-              <a:t>●  换物候表 + 坐标即可复制到其他柑橘产区</a:t>
-            </a:r>
-          </a:p>
-          <a:p>
-            <a:r>
-              <a:rPr sz="1600" b="0">
+              <a:t>●  同气候带柑橘产区＝弱复制（仍需当地校准）</a:t>
+            </a:r>
+          </a:p>
+          <a:p>
+            <a:r>
+              <a:rPr sz="1500" b="0">
                 <a:solidFill>
                   <a:srgbClr val="1F2D27"/>
                 </a:solidFill>
               </a:rPr>
-              <a:t>●  同一引擎可扩展至茶园等库区作物</a:t>
-            </a:r>
-          </a:p>
-          <a:p>
-            <a:r>
-              <a:rPr sz="1600" b="0">
+              <a:t>●  跨作物（茶园）＝强校准 5–15 人日／产区</a:t>
+            </a:r>
+          </a:p>
+          <a:p>
+            <a:r>
+              <a:rPr sz="1500" b="0">
                 <a:solidFill>
                   <a:srgbClr val="1F2D27"/>
                 </a:solidFill>
               </a:rPr>
-              <a:t>●  代码开源，数据全部公开来源</a:t>
-            </a:r>
-          </a:p>
-          <a:p>
-            <a:r>
-              <a:rPr sz="1600" b="0">
+              <a:t>●  12 个月内只做丹江口一地</a:t>
+            </a:r>
+          </a:p>
+          <a:p>
+            <a:r>
+              <a:rPr sz="1500" b="0">
                 <a:solidFill>
                   <a:srgbClr val="1F2D27"/>
                 </a:solidFill>
               </a:rPr>
-              <a:t>●  不采集个人身份信息，可随时退出</a:t>
+              <a:t>●  bus factor＝1：暂无人承诺接手，故不自称</a:t>
+            </a:r>
+          </a:p>
+          <a:p>
+            <a:r>
+              <a:rPr sz="1500" b="0">
+                <a:solidFill>
+                  <a:srgbClr val="1F2D27"/>
+                </a:solidFill>
+              </a:rPr>
+              <a:t>     “可依赖的公共基础设施”</a:t>
             </a:r>
           </a:p>
         </p:txBody>
@@ -5485,22 +5515,22 @@
           <a:lstStyle/>
           <a:p>
             <a:r>
-              <a:rPr sz="1600" b="0">
+              <a:rPr sz="1400" b="0">
                 <a:solidFill>
                   <a:srgbClr val="C0392B"/>
                 </a:solidFill>
               </a:rPr>
-              <a:t>安全边界：风险等级用于辅助安排农事，不构成灾害预警，不替代官方气象预警与专业农技指导；</a:t>
-            </a:r>
-          </a:p>
-          <a:p>
-            <a:r>
-              <a:rPr sz="1600" b="0">
+              <a:t>安全边界：风险等级用于辅助安排农事，不构成灾害预警，不替代官方气象预警与专业农技指导；再分析数据有不确定性，重要决策结合当地气象部门信息。</a:t>
+            </a:r>
+          </a:p>
+          <a:p>
+            <a:r>
+              <a:rPr sz="1400" b="0">
                 <a:solidFill>
                   <a:srgbClr val="C0392B"/>
                 </a:solidFill>
               </a:rPr>
-              <a:t>再分析数据有不确定性，重要决策结合当地气象部门信息。</a:t>
+              <a:t>伦理：不采集个人身份信息；试点凭证（截图/照片）打码后本地留存，对外只给聚合统计，参与者可随时退出并要求删除。</a:t>
             </a:r>
           </a:p>
         </p:txBody>

--- a/丹橘知旱-参赛PPT.pptx
+++ b/丹橘知旱-参赛PPT.pptx
@@ -4591,7 +4591,7 @@
           <a:lstStyle/>
           <a:p>
             <a:r>
-              <a:rPr sz="1600" b="0">
+              <a:rPr sz="1500" b="0">
                 <a:solidFill>
                   <a:srgbClr val="1F2D27"/>
                 </a:solidFill>
@@ -4601,7 +4601,7 @@
           </a:p>
           <a:p>
             <a:r>
-              <a:rPr sz="1600" b="0">
+              <a:rPr sz="1500" b="0">
                 <a:solidFill>
                   <a:srgbClr val="1F2D27"/>
                 </a:solidFill>
@@ -4611,7 +4611,7 @@
           </a:p>
           <a:p>
             <a:r>
-              <a:rPr sz="1600" b="0">
+              <a:rPr sz="1500" b="0">
                 <a:solidFill>
                   <a:srgbClr val="1F2D27"/>
                 </a:solidFill>
@@ -4621,22 +4621,42 @@
           </a:p>
           <a:p>
             <a:r>
-              <a:rPr sz="1600" b="0">
+              <a:rPr sz="1500" b="0">
                 <a:solidFill>
                   <a:srgbClr val="1F2D27"/>
                 </a:solidFill>
               </a:rPr>
-              <a:t>●  与 Python 独立实现由脚本逐日对拍强制等价</a:t>
-            </a:r>
-          </a:p>
-          <a:p>
-            <a:r>
-              <a:rPr sz="1600" b="0">
+              <a:t>●  干旱为降水型 + 蒸散型双口径取高者</a:t>
+            </a:r>
+          </a:p>
+          <a:p>
+            <a:r>
+              <a:rPr sz="1500" b="0">
                 <a:solidFill>
                   <a:srgbClr val="1F2D27"/>
                 </a:solidFill>
               </a:rPr>
-              <a:t>     （442 天 + 23 组阈值边界用例）</a:t>
+              <a:t>     （ET0 参考蒸散，按物候期十年分位定标）</a:t>
+            </a:r>
+          </a:p>
+          <a:p>
+            <a:r>
+              <a:rPr sz="1500" b="0">
+                <a:solidFill>
+                  <a:srgbClr val="1F2D27"/>
+                </a:solidFill>
+              </a:rPr>
+              <a:t>●  与 Python 实现逐日对拍：442 天 + 33 组边界</a:t>
+            </a:r>
+          </a:p>
+          <a:p>
+            <a:r>
+              <a:rPr sz="1500" b="0">
+                <a:solidFill>
+                  <a:srgbClr val="1F2D27"/>
+                </a:solidFill>
+              </a:rPr>
+              <a:t>     用例 + 阈值三方绑定；15 个注入变异全被拦下</a:t>
             </a:r>
           </a:p>
         </p:txBody>
@@ -5020,7 +5040,7 @@
                   <a:srgbClr val="1F2D27"/>
                 </a:solidFill>
               </a:rPr>
-              <a:t>●  干旱同期『中』3 天／『重』0 天——十年基线已量化，是命名承诺的最弱环</a:t>
+              <a:t>●  干旱双口径同期『重』8 天／『中』54 天，首个提示 06-01（喂数带 35 天 warm-up，与产品一致）</a:t>
             </a:r>
           </a:p>
           <a:p>
@@ -5030,7 +5050,17 @@
                   <a:srgbClr val="1F2D27"/>
                 </a:solidFill>
               </a:rPr>
-              <a:t>●  可离线复算：输入序列已冻结入库；JS↔Python 逐日对拍 + 边界用例全通过</a:t>
+              <a:t>●  蒸散口径的增益点：2022-08-24~27 def30 123–138mm 判『重』，纯降水口径同期最高只判『中』</a:t>
+            </a:r>
+          </a:p>
+          <a:p>
+            <a:r>
+              <a:rPr sz="1500">
+                <a:solidFill>
+                  <a:srgbClr val="1F2D27"/>
+                </a:solidFill>
+              </a:rPr>
+              <a:t>●  可离线复算：输入序列已冻结入库；对拍 + 边界用例 + 变异自证三道闸门全绿</a:t>
             </a:r>
           </a:p>
         </p:txBody>

--- a/丹橘知旱-参赛PPT.pptx
+++ b/丹橘知旱-参赛PPT.pptx
@@ -12,6 +12,7 @@
     <p:sldId id="260" r:id="rId11"/>
     <p:sldId id="261" r:id="rId12"/>
     <p:sldId id="262" r:id="rId13"/>
+    <p:sldId id="263" r:id="rId14"/>
   </p:sldIdLst>
   <p:sldSz cx="12191695" cy="6858000" type="screen4x3"/>
   <p:notesSz cx="6858000" cy="9144000"/>
@@ -3140,7 +3141,139 @@
       </p:sp>
       <p:sp>
         <p:nvSpPr>
-          <p:cNvPr id="3" name="TextBox 2"/>
+          <p:cNvPr id="3" name="Oval 2"/>
+          <p:cNvSpPr/>
+          <p:nvPr/>
+        </p:nvSpPr>
+        <p:spPr>
+          <a:xfrm>
+            <a:off x="914400" y="1225296"/>
+            <a:ext cx="603504" cy="548640"/>
+          </a:xfrm>
+          <a:prstGeom prst="ellipse">
+            <a:avLst/>
+          </a:prstGeom>
+          <a:solidFill>
+            <a:srgbClr val="F08A20"/>
+          </a:solidFill>
+          <a:ln>
+            <a:noFill/>
+          </a:ln>
+          <a:effectLst/>
+        </p:spPr>
+        <p:style>
+          <a:lnRef idx="1">
+            <a:schemeClr val="accent1"/>
+          </a:lnRef>
+          <a:fillRef idx="3">
+            <a:schemeClr val="accent1"/>
+          </a:fillRef>
+          <a:effectRef idx="2">
+            <a:schemeClr val="accent1"/>
+          </a:effectRef>
+          <a:fontRef idx="minor">
+            <a:schemeClr val="lt1"/>
+          </a:fontRef>
+        </p:style>
+        <p:txBody>
+          <a:bodyPr rtlCol="0" anchor="ctr"/>
+          <a:lstStyle/>
+          <a:p>
+            <a:pPr algn="ctr"/>
+          </a:p>
+        </p:txBody>
+      </p:sp>
+      <p:sp>
+        <p:nvSpPr>
+          <p:cNvPr id="4" name="Oval 3"/>
+          <p:cNvSpPr/>
+          <p:nvPr/>
+        </p:nvSpPr>
+        <p:spPr>
+          <a:xfrm>
+            <a:off x="1161288" y="1051560"/>
+            <a:ext cx="173736" cy="173736"/>
+          </a:xfrm>
+          <a:prstGeom prst="ellipse">
+            <a:avLst/>
+          </a:prstGeom>
+          <a:solidFill>
+            <a:srgbClr val="268A5A"/>
+          </a:solidFill>
+          <a:ln>
+            <a:noFill/>
+          </a:ln>
+          <a:effectLst/>
+        </p:spPr>
+        <p:style>
+          <a:lnRef idx="1">
+            <a:schemeClr val="accent1"/>
+          </a:lnRef>
+          <a:fillRef idx="3">
+            <a:schemeClr val="accent1"/>
+          </a:fillRef>
+          <a:effectRef idx="2">
+            <a:schemeClr val="accent1"/>
+          </a:effectRef>
+          <a:fontRef idx="minor">
+            <a:schemeClr val="lt1"/>
+          </a:fontRef>
+        </p:style>
+        <p:txBody>
+          <a:bodyPr rtlCol="0" anchor="ctr"/>
+          <a:lstStyle/>
+          <a:p>
+            <a:pPr algn="ctr"/>
+          </a:p>
+        </p:txBody>
+      </p:sp>
+      <p:sp>
+        <p:nvSpPr>
+          <p:cNvPr id="5" name="Rectangle 4"/>
+          <p:cNvSpPr/>
+          <p:nvPr/>
+        </p:nvSpPr>
+        <p:spPr>
+          <a:xfrm>
+            <a:off x="914400" y="4407408"/>
+            <a:ext cx="1371600" cy="50292"/>
+          </a:xfrm>
+          <a:prstGeom prst="rect">
+            <a:avLst/>
+          </a:prstGeom>
+          <a:solidFill>
+            <a:srgbClr val="F08A20"/>
+          </a:solidFill>
+          <a:ln>
+            <a:noFill/>
+          </a:ln>
+          <a:effectLst/>
+        </p:spPr>
+        <p:style>
+          <a:lnRef idx="1">
+            <a:schemeClr val="accent1"/>
+          </a:lnRef>
+          <a:fillRef idx="3">
+            <a:schemeClr val="accent1"/>
+          </a:fillRef>
+          <a:effectRef idx="2">
+            <a:schemeClr val="accent1"/>
+          </a:effectRef>
+          <a:fontRef idx="minor">
+            <a:schemeClr val="lt1"/>
+          </a:fontRef>
+        </p:style>
+        <p:txBody>
+          <a:bodyPr rtlCol="0" anchor="ctr"/>
+          <a:lstStyle/>
+          <a:p>
+            <a:pPr algn="ctr"/>
+          </a:p>
+        </p:txBody>
+      </p:sp>
+      <p:sp>
+        <p:nvSpPr>
+          <p:cNvPr id="6" name="TextBox 5"/>
           <p:cNvSpPr txBox="1"/>
           <p:nvPr/>
         </p:nvSpPr>
@@ -3173,7 +3306,7 @@
       </p:sp>
       <p:sp>
         <p:nvSpPr>
-          <p:cNvPr id="4" name="TextBox 3"/>
+          <p:cNvPr id="7" name="TextBox 6"/>
           <p:cNvSpPr txBox="1"/>
           <p:nvPr/>
         </p:nvSpPr>
@@ -3206,7 +3339,7 @@
       </p:sp>
       <p:sp>
         <p:nvSpPr>
-          <p:cNvPr id="5" name="TextBox 4"/>
+          <p:cNvPr id="8" name="TextBox 7"/>
           <p:cNvSpPr txBox="1"/>
           <p:nvPr/>
         </p:nvSpPr>
@@ -3239,7 +3372,7 @@
       </p:sp>
       <p:sp>
         <p:nvSpPr>
-          <p:cNvPr id="6" name="TextBox 5"/>
+          <p:cNvPr id="9" name="TextBox 8"/>
           <p:cNvSpPr txBox="1"/>
           <p:nvPr/>
         </p:nvSpPr>
@@ -3351,7 +3484,7 @@
         <p:spPr>
           <a:xfrm>
             <a:off x="548640" y="320040"/>
-            <a:ext cx="1097280" cy="731520"/>
+            <a:ext cx="868680" cy="731520"/>
           </a:xfrm>
           <a:prstGeom prst="rect">
             <a:avLst/>
@@ -3383,7 +3516,7 @@
         </p:nvSpPr>
         <p:spPr>
           <a:xfrm>
-            <a:off x="1371600" y="475488"/>
+            <a:off x="1508760" y="475488"/>
             <a:ext cx="10058400" cy="640080"/>
           </a:xfrm>
           <a:prstGeom prst="rect">
@@ -3504,7 +3637,7 @@
         <p:spPr>
           <a:xfrm>
             <a:off x="640080" y="2697480"/>
-            <a:ext cx="10972800" cy="640080"/>
+            <a:ext cx="10972800" cy="685800"/>
           </a:xfrm>
           <a:prstGeom prst="rect">
             <a:avLst/>
@@ -3537,7 +3670,7 @@
         <p:spPr>
           <a:xfrm>
             <a:off x="640080" y="3429000"/>
-            <a:ext cx="10972800" cy="640080"/>
+            <a:ext cx="10972800" cy="685800"/>
           </a:xfrm>
           <a:prstGeom prst="rect">
             <a:avLst/>
@@ -3570,7 +3703,7 @@
         <p:spPr>
           <a:xfrm>
             <a:off x="640080" y="4160520"/>
-            <a:ext cx="10972800" cy="640080"/>
+            <a:ext cx="10972800" cy="1005840"/>
           </a:xfrm>
           <a:prstGeom prst="rect">
             <a:avLst/>
@@ -3589,7 +3722,27 @@
                   <a:srgbClr val="1F2D27"/>
                 </a:solidFill>
               </a:rPr>
-              <a:t>●  产区研究：2008—2023 年 38 次气象灾害，干旱致花期落花率增加 32%—45%；越冬冻害频发</a:t>
+              <a:t>●  文献记载（研究区为湖北武穴、非丹江口库区）：2008—2023 年 38 次气象灾害，</a:t>
+            </a:r>
+          </a:p>
+          <a:p>
+            <a:r>
+              <a:rPr sz="1600" b="0">
+                <a:solidFill>
+                  <a:srgbClr val="1F2D27"/>
+                </a:solidFill>
+              </a:rPr>
+              <a:t>     花期水分亏缺使落花率增加 32%-45%（DOI 10.12238/as.v8i8.3240）</a:t>
+            </a:r>
+          </a:p>
+          <a:p>
+            <a:r>
+              <a:rPr sz="1600" b="0">
+                <a:solidFill>
+                  <a:srgbClr val="1F2D27"/>
+                </a:solidFill>
+              </a:rPr>
+              <a:t>     ——只作为问题动机，不作为本工具的效果证据</a:t>
             </a:r>
           </a:p>
         </p:txBody>
@@ -3602,8 +3755,8 @@
         </p:nvSpPr>
         <p:spPr>
           <a:xfrm>
-            <a:off x="640080" y="4892040"/>
-            <a:ext cx="10972800" cy="640080"/>
+            <a:off x="640080" y="5303520"/>
+            <a:ext cx="10972800" cy="685800"/>
           </a:xfrm>
           <a:prstGeom prst="rect">
             <a:avLst/>
@@ -3635,7 +3788,7 @@
         </p:nvSpPr>
         <p:spPr>
           <a:xfrm>
-            <a:off x="640080" y="5806440"/>
+            <a:off x="640080" y="6035040"/>
             <a:ext cx="10972800" cy="640080"/>
           </a:xfrm>
           <a:prstGeom prst="rect">
@@ -3731,7 +3884,7 @@
         <p:spPr>
           <a:xfrm>
             <a:off x="548640" y="320040"/>
-            <a:ext cx="1097280" cy="731520"/>
+            <a:ext cx="868680" cy="731520"/>
           </a:xfrm>
           <a:prstGeom prst="rect">
             <a:avLst/>
@@ -3763,7 +3916,7 @@
         </p:nvSpPr>
         <p:spPr>
           <a:xfrm>
-            <a:off x="1371600" y="475488"/>
+            <a:off x="1508760" y="475488"/>
             <a:ext cx="10058400" cy="640080"/>
           </a:xfrm>
           <a:prstGeom prst="rect">
@@ -3924,16 +4077,16 @@
       </p:sp>
       <p:sp>
         <p:nvSpPr>
-          <p:cNvPr id="7" name="Can 6"/>
+          <p:cNvPr id="7" name="Rectangle 6"/>
           <p:cNvSpPr/>
           <p:nvPr/>
         </p:nvSpPr>
         <p:spPr>
           <a:xfrm>
-            <a:off x="3273552" y="2788920"/>
-            <a:ext cx="228600" cy="411480"/>
-          </a:xfrm>
-          <a:prstGeom prst="can">
+            <a:off x="3291839" y="2999232"/>
+            <a:ext cx="201168" cy="45720"/>
+          </a:xfrm>
+          <a:prstGeom prst="rect">
             <a:avLst/>
           </a:prstGeom>
           <a:solidFill>
@@ -4049,16 +4202,16 @@
       </p:sp>
       <p:sp>
         <p:nvSpPr>
-          <p:cNvPr id="9" name="Can 8"/>
+          <p:cNvPr id="9" name="Rectangle 8"/>
           <p:cNvSpPr/>
           <p:nvPr/>
         </p:nvSpPr>
         <p:spPr>
           <a:xfrm>
-            <a:off x="6153912" y="2788920"/>
-            <a:ext cx="228600" cy="411480"/>
-          </a:xfrm>
-          <a:prstGeom prst="can">
+            <a:off x="6172200" y="2999232"/>
+            <a:ext cx="201168" cy="45720"/>
+          </a:xfrm>
+          <a:prstGeom prst="rect">
             <a:avLst/>
           </a:prstGeom>
           <a:solidFill>
@@ -4174,16 +4327,16 @@
       </p:sp>
       <p:sp>
         <p:nvSpPr>
-          <p:cNvPr id="11" name="Can 10"/>
+          <p:cNvPr id="11" name="Rectangle 10"/>
           <p:cNvSpPr/>
           <p:nvPr/>
         </p:nvSpPr>
         <p:spPr>
           <a:xfrm>
-            <a:off x="9034272" y="2788920"/>
-            <a:ext cx="228600" cy="411480"/>
-          </a:xfrm>
-          <a:prstGeom prst="can">
+            <a:off x="9052560" y="2999232"/>
+            <a:ext cx="201168" cy="45720"/>
+          </a:xfrm>
+          <a:prstGeom prst="rect">
             <a:avLst/>
           </a:prstGeom>
           <a:solidFill>
@@ -4434,7 +4587,7 @@
         <p:spPr>
           <a:xfrm>
             <a:off x="548640" y="320040"/>
-            <a:ext cx="1097280" cy="731520"/>
+            <a:ext cx="868680" cy="731520"/>
           </a:xfrm>
           <a:prstGeom prst="rect">
             <a:avLst/>
@@ -4453,7 +4606,7 @@
                   <a:srgbClr val="1A7A4A"/>
                 </a:solidFill>
               </a:rPr>
-              <a:t>03</a:t>
+              <a:t>02</a:t>
             </a:r>
           </a:p>
         </p:txBody>
@@ -4466,7 +4619,7 @@
         </p:nvSpPr>
         <p:spPr>
           <a:xfrm>
-            <a:off x="1371600" y="475488"/>
+            <a:off x="1508760" y="475488"/>
             <a:ext cx="10058400" cy="640080"/>
           </a:xfrm>
           <a:prstGeom prst="rect">
@@ -4486,7 +4639,7 @@
                   <a:srgbClr val="0E5233"/>
                 </a:solidFill>
               </a:rPr>
-              <a:t>AI 承担的具体任务：规则算得准，大模型讲得懂</a:t>
+              <a:t>产品界面：真实截图（与在线 Demo 同版）</a:t>
             </a:r>
           </a:p>
         </p:txBody>
@@ -4535,16 +4688,45 @@
           </a:p>
         </p:txBody>
       </p:sp>
-      <p:sp>
-        <p:nvSpPr>
-          <p:cNvPr id="6" name="TextBox 5"/>
+      <p:pic>
+        <p:nvPicPr>
+          <p:cNvPr id="6" name="Picture 5" descr="dashboard.png"/>
+          <p:cNvPicPr>
+            <a:picLocks noChangeAspect="1"/>
+          </p:cNvPicPr>
+          <p:nvPr/>
+        </p:nvPicPr>
+        <p:blipFill>
+          <a:blip r:embed="rId2"/>
+          <a:stretch>
+            <a:fillRect/>
+          </a:stretch>
+        </p:blipFill>
+        <p:spPr>
+          <a:xfrm>
+            <a:off x="640080" y="1645920"/>
+            <a:ext cx="3310128" cy="1865376"/>
+          </a:xfrm>
+          <a:prstGeom prst="rect">
+            <a:avLst/>
+          </a:prstGeom>
+          <a:ln w="12700">
+            <a:solidFill>
+              <a:srgbClr val="1A7A4A"/>
+            </a:solidFill>
+          </a:ln>
+        </p:spPr>
+      </p:pic>
+      <p:sp>
+        <p:nvSpPr>
+          <p:cNvPr id="7" name="TextBox 6"/>
           <p:cNvSpPr txBox="1"/>
           <p:nvPr/>
         </p:nvSpPr>
         <p:spPr>
           <a:xfrm>
-            <a:off x="640080" y="1600200"/>
-            <a:ext cx="5303520" cy="457200"/>
+            <a:off x="640080" y="3566160"/>
+            <a:ext cx="3310128" cy="457200"/>
           </a:xfrm>
           <a:prstGeom prst="rect">
             <a:avLst/>
@@ -4558,26 +4740,55 @@
           <a:lstStyle/>
           <a:p>
             <a:r>
-              <a:rPr sz="2000" b="1">
-                <a:solidFill>
-                  <a:srgbClr val="0E5233"/>
-                </a:solidFill>
-              </a:rPr>
-              <a:t>① 确定性风险引擎（核心）</a:t>
-            </a:r>
-          </a:p>
-        </p:txBody>
-      </p:sp>
-      <p:sp>
-        <p:nvSpPr>
-          <p:cNvPr id="7" name="TextBox 6"/>
+              <a:rPr sz="1200" b="0">
+                <a:solidFill>
+                  <a:srgbClr val="6B7A72"/>
+                </a:solidFill>
+              </a:rPr>
+              <a:t>① 风险看板：当前物候期 + 四类风险等级与触发依据</a:t>
+            </a:r>
+          </a:p>
+        </p:txBody>
+      </p:sp>
+      <p:pic>
+        <p:nvPicPr>
+          <p:cNvPr id="8" name="Picture 7" descr="replay.png"/>
+          <p:cNvPicPr>
+            <a:picLocks noChangeAspect="1"/>
+          </p:cNvPicPr>
+          <p:nvPr/>
+        </p:nvPicPr>
+        <p:blipFill>
+          <a:blip r:embed="rId3"/>
+          <a:stretch>
+            <a:fillRect/>
+          </a:stretch>
+        </p:blipFill>
+        <p:spPr>
+          <a:xfrm>
+            <a:off x="4443984" y="1645920"/>
+            <a:ext cx="3310128" cy="1865376"/>
+          </a:xfrm>
+          <a:prstGeom prst="rect">
+            <a:avLst/>
+          </a:prstGeom>
+          <a:ln w="12700">
+            <a:solidFill>
+              <a:srgbClr val="1A7A4A"/>
+            </a:solidFill>
+          </a:ln>
+        </p:spPr>
+      </p:pic>
+      <p:sp>
+        <p:nvSpPr>
+          <p:cNvPr id="9" name="TextBox 8"/>
           <p:cNvSpPr txBox="1"/>
           <p:nvPr/>
         </p:nvSpPr>
         <p:spPr>
           <a:xfrm>
-            <a:off x="640080" y="2103120"/>
-            <a:ext cx="5303520" cy="3108960"/>
+            <a:off x="4443984" y="3566160"/>
+            <a:ext cx="3310128" cy="457200"/>
           </a:xfrm>
           <a:prstGeom prst="rect">
             <a:avLst/>
@@ -4591,86 +4802,55 @@
           <a:lstStyle/>
           <a:p>
             <a:r>
-              <a:rPr sz="1500" b="0">
-                <a:solidFill>
-                  <a:srgbClr val="1F2D27"/>
-                </a:solidFill>
-              </a:rPr>
-              <a:t>●  阈值 + 连续日数 + 物候期组合判断，逐日输出</a:t>
-            </a:r>
-          </a:p>
-          <a:p>
-            <a:r>
-              <a:rPr sz="1500" b="0">
-                <a:solidFill>
-                  <a:srgbClr val="1F2D27"/>
-                </a:solidFill>
-              </a:rPr>
-              <a:t>     等级与触发依据</a:t>
-            </a:r>
-          </a:p>
-          <a:p>
-            <a:r>
-              <a:rPr sz="1500" b="0">
-                <a:solidFill>
-                  <a:srgbClr val="1F2D27"/>
-                </a:solidFill>
-              </a:rPr>
-              <a:t>●  全部阈值显式可审计、可复算、可回测</a:t>
-            </a:r>
-          </a:p>
-          <a:p>
-            <a:r>
-              <a:rPr sz="1500" b="0">
-                <a:solidFill>
-                  <a:srgbClr val="1F2D27"/>
-                </a:solidFill>
-              </a:rPr>
-              <a:t>●  干旱为降水型 + 蒸散型双口径取高者</a:t>
-            </a:r>
-          </a:p>
-          <a:p>
-            <a:r>
-              <a:rPr sz="1500" b="0">
-                <a:solidFill>
-                  <a:srgbClr val="1F2D27"/>
-                </a:solidFill>
-              </a:rPr>
-              <a:t>     （ET0 参考蒸散，按物候期十年分位定标）</a:t>
-            </a:r>
-          </a:p>
-          <a:p>
-            <a:r>
-              <a:rPr sz="1500" b="0">
-                <a:solidFill>
-                  <a:srgbClr val="1F2D27"/>
-                </a:solidFill>
-              </a:rPr>
-              <a:t>●  与 Python 实现逐日对拍：442 天 + 33 组边界</a:t>
-            </a:r>
-          </a:p>
-          <a:p>
-            <a:r>
-              <a:rPr sz="1500" b="0">
-                <a:solidFill>
-                  <a:srgbClr val="1F2D27"/>
-                </a:solidFill>
-              </a:rPr>
-              <a:t>     用例 + 阈值三方绑定；15 个注入变异全被拦下</a:t>
-            </a:r>
-          </a:p>
-        </p:txBody>
-      </p:sp>
-      <p:sp>
-        <p:nvSpPr>
-          <p:cNvPr id="8" name="TextBox 7"/>
+              <a:rPr sz="1200" b="0">
+                <a:solidFill>
+                  <a:srgbClr val="6B7A72"/>
+                </a:solidFill>
+              </a:rPr>
+              <a:t>② 历史回放：2022 年夏季热害过程逐日重放</a:t>
+            </a:r>
+          </a:p>
+        </p:txBody>
+      </p:sp>
+      <p:pic>
+        <p:nvPicPr>
+          <p:cNvPr id="10" name="Picture 9" descr="calendar.png"/>
+          <p:cNvPicPr>
+            <a:picLocks noChangeAspect="1"/>
+          </p:cNvPicPr>
+          <p:nvPr/>
+        </p:nvPicPr>
+        <p:blipFill>
+          <a:blip r:embed="rId4"/>
+          <a:stretch>
+            <a:fillRect/>
+          </a:stretch>
+        </p:blipFill>
+        <p:spPr>
+          <a:xfrm>
+            <a:off x="8247888" y="1645920"/>
+            <a:ext cx="3310128" cy="1865376"/>
+          </a:xfrm>
+          <a:prstGeom prst="rect">
+            <a:avLst/>
+          </a:prstGeom>
+          <a:ln w="12700">
+            <a:solidFill>
+              <a:srgbClr val="1A7A4A"/>
+            </a:solidFill>
+          </a:ln>
+        </p:spPr>
+      </p:pic>
+      <p:sp>
+        <p:nvSpPr>
+          <p:cNvPr id="11" name="TextBox 10"/>
           <p:cNvSpPr txBox="1"/>
           <p:nvPr/>
         </p:nvSpPr>
         <p:spPr>
           <a:xfrm>
-            <a:off x="6309360" y="1600200"/>
-            <a:ext cx="5303520" cy="457200"/>
+            <a:off x="8247888" y="3566160"/>
+            <a:ext cx="3310128" cy="457200"/>
           </a:xfrm>
           <a:prstGeom prst="rect">
             <a:avLst/>
@@ -4684,26 +4864,55 @@
           <a:lstStyle/>
           <a:p>
             <a:r>
-              <a:rPr sz="2000" b="1">
-                <a:solidFill>
-                  <a:srgbClr val="0E5233"/>
-                </a:solidFill>
-              </a:rPr>
-              <a:t>② DeepSeek 大模型解释层（可选接入）</a:t>
-            </a:r>
-          </a:p>
-        </p:txBody>
-      </p:sp>
-      <p:sp>
-        <p:nvSpPr>
-          <p:cNvPr id="9" name="TextBox 8"/>
+              <a:rPr sz="1200" b="0">
+                <a:solidFill>
+                  <a:srgbClr val="6B7A72"/>
+                </a:solidFill>
+              </a:rPr>
+              <a:t>③ 90 天风险日历（可导出 CSV，带 BOM，Excel 直开）</a:t>
+            </a:r>
+          </a:p>
+        </p:txBody>
+      </p:sp>
+      <p:pic>
+        <p:nvPicPr>
+          <p:cNvPr id="12" name="Picture 11" descr="qa.png"/>
+          <p:cNvPicPr>
+            <a:picLocks noChangeAspect="1"/>
+          </p:cNvPicPr>
+          <p:nvPr/>
+        </p:nvPicPr>
+        <p:blipFill>
+          <a:blip r:embed="rId5"/>
+          <a:stretch>
+            <a:fillRect/>
+          </a:stretch>
+        </p:blipFill>
+        <p:spPr>
+          <a:xfrm>
+            <a:off x="640080" y="4114800"/>
+            <a:ext cx="3310128" cy="1865376"/>
+          </a:xfrm>
+          <a:prstGeom prst="rect">
+            <a:avLst/>
+          </a:prstGeom>
+          <a:ln w="12700">
+            <a:solidFill>
+              <a:srgbClr val="1A7A4A"/>
+            </a:solidFill>
+          </a:ln>
+        </p:spPr>
+      </p:pic>
+      <p:sp>
+        <p:nvSpPr>
+          <p:cNvPr id="13" name="TextBox 12"/>
           <p:cNvSpPr txBox="1"/>
           <p:nvPr/>
         </p:nvSpPr>
         <p:spPr>
           <a:xfrm>
-            <a:off x="6309360" y="2103120"/>
-            <a:ext cx="5303520" cy="3108960"/>
+            <a:off x="640080" y="6035040"/>
+            <a:ext cx="3310128" cy="457200"/>
           </a:xfrm>
           <a:prstGeom prst="rect">
             <a:avLst/>
@@ -4717,56 +4926,55 @@
           <a:lstStyle/>
           <a:p>
             <a:r>
-              <a:rPr sz="1600" b="0">
-                <a:solidFill>
-                  <a:srgbClr val="1F2D27"/>
-                </a:solidFill>
-              </a:rPr>
-              <a:t>●  以风险数据 + 农技规则库为上下文，生成个性化</a:t>
-            </a:r>
-          </a:p>
-          <a:p>
-            <a:r>
-              <a:rPr sz="1600" b="0">
-                <a:solidFill>
-                  <a:srgbClr val="1F2D27"/>
-                </a:solidFill>
-              </a:rPr>
-              <a:t>     建议与自然语言追问</a:t>
-            </a:r>
-          </a:p>
-          <a:p>
-            <a:r>
-              <a:rPr sz="1600" b="0">
-                <a:solidFill>
-                  <a:srgbClr val="1F2D27"/>
-                </a:solidFill>
-              </a:rPr>
-              <a:t>●  回答强制引用数据日期，抑制幻觉</a:t>
-            </a:r>
-          </a:p>
-          <a:p>
-            <a:r>
-              <a:rPr sz="1600" b="0">
-                <a:solidFill>
-                  <a:srgbClr val="1F2D27"/>
-                </a:solidFill>
-              </a:rPr>
-              <a:t>●  LLM 只做转译与解释，不做数值预测</a:t>
-            </a:r>
-          </a:p>
-        </p:txBody>
-      </p:sp>
-      <p:sp>
-        <p:nvSpPr>
-          <p:cNvPr id="10" name="TextBox 9"/>
+              <a:rPr sz="1200" b="0">
+                <a:solidFill>
+                  <a:srgbClr val="6B7A72"/>
+                </a:solidFill>
+              </a:rPr>
+              <a:t>④ 问答：未配 Key 时由内置规则问答兜底</a:t>
+            </a:r>
+          </a:p>
+        </p:txBody>
+      </p:sp>
+      <p:pic>
+        <p:nvPicPr>
+          <p:cNvPr id="14" name="Picture 13" descr="advice-export.png"/>
+          <p:cNvPicPr>
+            <a:picLocks noChangeAspect="1"/>
+          </p:cNvPicPr>
+          <p:nvPr/>
+        </p:nvPicPr>
+        <p:blipFill>
+          <a:blip r:embed="rId6"/>
+          <a:stretch>
+            <a:fillRect/>
+          </a:stretch>
+        </p:blipFill>
+        <p:spPr>
+          <a:xfrm>
+            <a:off x="4443984" y="4114800"/>
+            <a:ext cx="3310128" cy="1865376"/>
+          </a:xfrm>
+          <a:prstGeom prst="rect">
+            <a:avLst/>
+          </a:prstGeom>
+          <a:ln w="12700">
+            <a:solidFill>
+              <a:srgbClr val="1A7A4A"/>
+            </a:solidFill>
+          </a:ln>
+        </p:spPr>
+      </p:pic>
+      <p:sp>
+        <p:nvSpPr>
+          <p:cNvPr id="15" name="TextBox 14"/>
           <p:cNvSpPr txBox="1"/>
           <p:nvPr/>
         </p:nvSpPr>
         <p:spPr>
           <a:xfrm>
-            <a:off x="640080" y="5394960"/>
-            <a:ext cx="10972800" cy="822960"/>
+            <a:off x="4443984" y="6035040"/>
+            <a:ext cx="3310128" cy="457200"/>
           </a:xfrm>
           <a:prstGeom prst="rect">
             <a:avLst/>
@@ -4780,12 +4988,105 @@
           <a:lstStyle/>
           <a:p>
             <a:r>
-              <a:rPr sz="1500" b="0">
+              <a:rPr sz="1200" b="0">
                 <a:solidFill>
                   <a:srgbClr val="6B7A72"/>
                 </a:solidFill>
               </a:rPr>
-              <a:t>为什么不是「为了 AI 而 AI」：没有大模型时产品依然完整可用；大模型解决的是「同一份数据对不同用户的不同表述 + 追问」这一具体负担。</a:t>
+              <a:t>⑤ 农事建议与导出报告（可打印张贴给农技员）</a:t>
+            </a:r>
+          </a:p>
+        </p:txBody>
+      </p:sp>
+      <p:sp>
+        <p:nvSpPr>
+          <p:cNvPr id="16" name="Rectangle 15"/>
+          <p:cNvSpPr/>
+          <p:nvPr/>
+        </p:nvSpPr>
+        <p:spPr>
+          <a:xfrm>
+            <a:off x="8247888" y="4114800"/>
+            <a:ext cx="3310128" cy="1865376"/>
+          </a:xfrm>
+          <a:prstGeom prst="rect">
+            <a:avLst/>
+          </a:prstGeom>
+          <a:solidFill>
+            <a:srgbClr val="EFF6F1"/>
+          </a:solidFill>
+          <a:ln>
+            <a:solidFill>
+              <a:srgbClr val="1A7A4A"/>
+            </a:solidFill>
+          </a:ln>
+          <a:effectLst/>
+        </p:spPr>
+        <p:style>
+          <a:lnRef idx="1">
+            <a:schemeClr val="accent1"/>
+          </a:lnRef>
+          <a:fillRef idx="3">
+            <a:schemeClr val="accent1"/>
+          </a:fillRef>
+          <a:effectRef idx="2">
+            <a:schemeClr val="accent1"/>
+          </a:effectRef>
+          <a:fontRef idx="minor">
+            <a:schemeClr val="lt1"/>
+          </a:fontRef>
+        </p:style>
+        <p:txBody>
+          <a:bodyPr rtlCol="0" anchor="ctr" wrap="square"/>
+          <a:lstStyle/>
+          <a:p>
+            <a:r>
+              <a:rPr sz="1700" b="1">
+                <a:solidFill>
+                  <a:srgbClr val="0E5233"/>
+                </a:solidFill>
+              </a:rPr>
+              <a:t>手机浏览器打开即用</a:t>
+            </a:r>
+          </a:p>
+          <a:p>
+            <a:r>
+              <a:rPr sz="1300">
+                <a:solidFill>
+                  <a:srgbClr val="1F2D27"/>
+                </a:solidFill>
+              </a:rPr>
+              <a:t>·  无安装、无账号、无后端</a:t>
+            </a:r>
+          </a:p>
+          <a:p>
+            <a:r>
+              <a:rPr sz="1300">
+                <a:solidFill>
+                  <a:srgbClr val="1F2D27"/>
+                </a:solidFill>
+              </a:rPr>
+              <a:t>·  园块条件与确认记录只存本机</a:t>
+            </a:r>
+          </a:p>
+          <a:p>
+            <a:r>
+              <a:rPr sz="1300">
+                <a:solidFill>
+                  <a:srgbClr val="1F2D27"/>
+                </a:solidFill>
+              </a:rPr>
+              <a:t>·  85 秒演示视频：1080p，配音＋字幕</a:t>
+            </a:r>
+          </a:p>
+          <a:p>
+            <a:r>
+              <a:rPr sz="1300">
+                <a:solidFill>
+                  <a:srgbClr val="1F2D27"/>
+                </a:solidFill>
+              </a:rPr>
+              <a:t>·  在线体验见 02 页链接</a:t>
             </a:r>
           </a:p>
         </p:txBody>
@@ -4861,7 +5162,7 @@
         <p:spPr>
           <a:xfrm>
             <a:off x="548640" y="320040"/>
-            <a:ext cx="1097280" cy="731520"/>
+            <a:ext cx="868680" cy="731520"/>
           </a:xfrm>
           <a:prstGeom prst="rect">
             <a:avLst/>
@@ -4880,7 +5181,7 @@
                   <a:srgbClr val="1A7A4A"/>
                 </a:solidFill>
               </a:rPr>
-              <a:t>04</a:t>
+              <a:t>03</a:t>
             </a:r>
           </a:p>
         </p:txBody>
@@ -4893,7 +5194,7 @@
         </p:nvSpPr>
         <p:spPr>
           <a:xfrm>
-            <a:off x="1371600" y="475488"/>
+            <a:off x="1508760" y="475488"/>
             <a:ext cx="10058400" cy="640080"/>
           </a:xfrm>
           <a:prstGeom prst="rect">
@@ -4913,7 +5214,7 @@
                   <a:srgbClr val="0E5233"/>
                 </a:solidFill>
               </a:rPr>
-              <a:t>验证：历史回测已通过，90 天试点已设计</a:t>
+              <a:t>AI 承担的具体任务：规则算得准，大模型讲得懂</a:t>
             </a:r>
           </a:p>
         </p:txBody>
@@ -4964,117 +5265,14 @@
       </p:sp>
       <p:sp>
         <p:nvSpPr>
-          <p:cNvPr id="6" name="Rectangle 5"/>
-          <p:cNvSpPr/>
-          <p:nvPr/>
-        </p:nvSpPr>
-        <p:spPr>
-          <a:xfrm>
-            <a:off x="640080" y="1554480"/>
-            <a:ext cx="10972800" cy="2377440"/>
-          </a:xfrm>
-          <a:prstGeom prst="rect">
-            <a:avLst/>
-          </a:prstGeom>
-          <a:solidFill>
-            <a:srgbClr val="EFF6F1"/>
-          </a:solidFill>
-          <a:ln>
-            <a:solidFill>
-              <a:srgbClr val="1A7A4A"/>
-            </a:solidFill>
-          </a:ln>
-          <a:effectLst/>
-        </p:spPr>
-        <p:style>
-          <a:lnRef idx="1">
-            <a:schemeClr val="accent1"/>
-          </a:lnRef>
-          <a:fillRef idx="3">
-            <a:schemeClr val="accent1"/>
-          </a:fillRef>
-          <a:effectRef idx="2">
-            <a:schemeClr val="accent1"/>
-          </a:effectRef>
-          <a:fontRef idx="minor">
-            <a:schemeClr val="lt1"/>
-          </a:fontRef>
-        </p:style>
-        <p:txBody>
-          <a:bodyPr rtlCol="0" anchor="ctr" wrap="square"/>
-          <a:lstStyle/>
-          <a:p>
-            <a:r>
-              <a:rPr sz="2000" b="1">
-                <a:solidFill>
-                  <a:srgbClr val="0E5233"/>
-                </a:solidFill>
-              </a:rPr>
-              <a:t>历史回测（2022 年热害 · 凉水河镇 · 真实数据）</a:t>
-            </a:r>
-          </a:p>
-          <a:p>
-            <a:r>
-              <a:rPr sz="1500">
-                <a:solidFill>
-                  <a:srgbClr val="1F2D27"/>
-                </a:solidFill>
-              </a:rPr>
-              <a:t>●  ≥35℃ 高温日 30 天    热害『重』级 13 天    极端最高 40.9℃（08-07）</a:t>
-            </a:r>
-          </a:p>
-          <a:p>
-            <a:r>
-              <a:rPr sz="1500">
-                <a:solidFill>
-                  <a:srgbClr val="1F2D27"/>
-                </a:solidFill>
-              </a:rPr>
-              <a:t>●  首个『重』级提示 2022-08-04（39.2℃）——比峰值提前 3 天；时效归因于单日 ≥39℃ 阈值，不记在连续升级头上</a:t>
-            </a:r>
-          </a:p>
-          <a:p>
-            <a:r>
-              <a:rPr sz="1500">
-                <a:solidFill>
-                  <a:srgbClr val="1F2D27"/>
-                </a:solidFill>
-              </a:rPr>
-              <a:t>●  干旱双口径同期『重』8 天／『中』54 天，首个提示 06-01（喂数带 35 天 warm-up，与产品一致）</a:t>
-            </a:r>
-          </a:p>
-          <a:p>
-            <a:r>
-              <a:rPr sz="1500">
-                <a:solidFill>
-                  <a:srgbClr val="1F2D27"/>
-                </a:solidFill>
-              </a:rPr>
-              <a:t>●  蒸散口径的增益点：2022-08-24~27 def30 123–138mm 判『重』，纯降水口径同期最高只判『中』</a:t>
-            </a:r>
-          </a:p>
-          <a:p>
-            <a:r>
-              <a:rPr sz="1500">
-                <a:solidFill>
-                  <a:srgbClr val="1F2D27"/>
-                </a:solidFill>
-              </a:rPr>
-              <a:t>●  可离线复算：输入序列已冻结入库；对拍 + 边界用例 + 变异自证三道闸门全绿</a:t>
-            </a:r>
-          </a:p>
-        </p:txBody>
-      </p:sp>
-      <p:sp>
-        <p:nvSpPr>
-          <p:cNvPr id="7" name="TextBox 6"/>
+          <p:cNvPr id="6" name="TextBox 5"/>
           <p:cNvSpPr txBox="1"/>
           <p:nvPr/>
         </p:nvSpPr>
         <p:spPr>
           <a:xfrm>
-            <a:off x="640080" y="4114800"/>
-            <a:ext cx="10972800" cy="2011680"/>
+            <a:off x="640080" y="1600200"/>
+            <a:ext cx="5303520" cy="457200"/>
           </a:xfrm>
           <a:prstGeom prst="rect">
             <a:avLst/>
@@ -5088,12 +5286,191 @@
           <a:lstStyle/>
           <a:p>
             <a:r>
+              <a:rPr sz="2000" b="1">
+                <a:solidFill>
+                  <a:srgbClr val="0E5233"/>
+                </a:solidFill>
+              </a:rPr>
+              <a:t>① 确定性风险引擎（核心）</a:t>
+            </a:r>
+          </a:p>
+        </p:txBody>
+      </p:sp>
+      <p:sp>
+        <p:nvSpPr>
+          <p:cNvPr id="7" name="TextBox 6"/>
+          <p:cNvSpPr txBox="1"/>
+          <p:nvPr/>
+        </p:nvSpPr>
+        <p:spPr>
+          <a:xfrm>
+            <a:off x="640080" y="2103120"/>
+            <a:ext cx="5303520" cy="3108960"/>
+          </a:xfrm>
+          <a:prstGeom prst="rect">
+            <a:avLst/>
+          </a:prstGeom>
+          <a:noFill/>
+        </p:spPr>
+        <p:txBody>
+          <a:bodyPr wrap="square">
+            <a:spAutoFit/>
+          </a:bodyPr>
+          <a:lstStyle/>
+          <a:p>
+            <a:r>
+              <a:rPr sz="1500" b="0">
+                <a:solidFill>
+                  <a:srgbClr val="1F2D27"/>
+                </a:solidFill>
+              </a:rPr>
+              <a:t>●  阈值 + 连续日数 + 物候期组合判断，逐日输出</a:t>
+            </a:r>
+          </a:p>
+          <a:p>
+            <a:r>
+              <a:rPr sz="1500" b="0">
+                <a:solidFill>
+                  <a:srgbClr val="1F2D27"/>
+                </a:solidFill>
+              </a:rPr>
+              <a:t>     等级与触发依据</a:t>
+            </a:r>
+          </a:p>
+          <a:p>
+            <a:r>
+              <a:rPr sz="1500" b="0">
+                <a:solidFill>
+                  <a:srgbClr val="1F2D27"/>
+                </a:solidFill>
+              </a:rPr>
+              <a:t>●  全部阈值显式可审计、可复算、可回测</a:t>
+            </a:r>
+          </a:p>
+          <a:p>
+            <a:r>
+              <a:rPr sz="1500" b="0">
+                <a:solidFill>
+                  <a:srgbClr val="1F2D27"/>
+                </a:solidFill>
+              </a:rPr>
+              <a:t>●  干旱为降水型 + 蒸散型双口径取高者</a:t>
+            </a:r>
+          </a:p>
+          <a:p>
+            <a:r>
+              <a:rPr sz="1500" b="0">
+                <a:solidFill>
+                  <a:srgbClr val="1F2D27"/>
+                </a:solidFill>
+              </a:rPr>
+              <a:t>     （ET0 参考蒸散，按物候期 2016–2020 定标，</a:t>
+            </a:r>
+          </a:p>
+          <a:p>
+            <a:r>
+              <a:rPr sz="1500" b="0">
+                <a:solidFill>
+                  <a:srgbClr val="1F2D27"/>
+                </a:solidFill>
+              </a:rPr>
+              <a:t>     单独出级封顶中、需降水佐证才到重）</a:t>
+            </a:r>
+          </a:p>
+          <a:p>
+            <a:r>
+              <a:rPr sz="1500" b="0">
+                <a:solidFill>
+                  <a:srgbClr val="1F2D27"/>
+                </a:solidFill>
+              </a:rPr>
+              <a:t>●  与 Python 实现逐日对拍：442 天 + 37 组边界</a:t>
+            </a:r>
+          </a:p>
+          <a:p>
+            <a:r>
+              <a:rPr sz="1500" b="0">
+                <a:solidFill>
+                  <a:srgbClr val="1F2D27"/>
+                </a:solidFill>
+              </a:rPr>
+              <a:t>     用例 + 阈值三方绑定 + 四类归因文案逐字符比对；</a:t>
+            </a:r>
+          </a:p>
+          <a:p>
+            <a:r>
+              <a:rPr sz="1500" b="0">
+                <a:solidFill>
+                  <a:srgbClr val="1F2D27"/>
+                </a:solidFill>
+              </a:rPr>
+              <a:t>     44 个注入变异全被四道闸门拦下</a:t>
+            </a:r>
+          </a:p>
+        </p:txBody>
+      </p:sp>
+      <p:sp>
+        <p:nvSpPr>
+          <p:cNvPr id="8" name="TextBox 7"/>
+          <p:cNvSpPr txBox="1"/>
+          <p:nvPr/>
+        </p:nvSpPr>
+        <p:spPr>
+          <a:xfrm>
+            <a:off x="6309360" y="1600200"/>
+            <a:ext cx="5303520" cy="457200"/>
+          </a:xfrm>
+          <a:prstGeom prst="rect">
+            <a:avLst/>
+          </a:prstGeom>
+          <a:noFill/>
+        </p:spPr>
+        <p:txBody>
+          <a:bodyPr wrap="square">
+            <a:spAutoFit/>
+          </a:bodyPr>
+          <a:lstStyle/>
+          <a:p>
+            <a:r>
+              <a:rPr sz="2000" b="1">
+                <a:solidFill>
+                  <a:srgbClr val="0E5233"/>
+                </a:solidFill>
+              </a:rPr>
+              <a:t>② DeepSeek 大模型解释层（可选接入）</a:t>
+            </a:r>
+          </a:p>
+        </p:txBody>
+      </p:sp>
+      <p:sp>
+        <p:nvSpPr>
+          <p:cNvPr id="9" name="TextBox 8"/>
+          <p:cNvSpPr txBox="1"/>
+          <p:nvPr/>
+        </p:nvSpPr>
+        <p:spPr>
+          <a:xfrm>
+            <a:off x="6309360" y="2103120"/>
+            <a:ext cx="5303520" cy="3108960"/>
+          </a:xfrm>
+          <a:prstGeom prst="rect">
+            <a:avLst/>
+          </a:prstGeom>
+          <a:noFill/>
+        </p:spPr>
+        <p:txBody>
+          <a:bodyPr wrap="square">
+            <a:spAutoFit/>
+          </a:bodyPr>
+          <a:lstStyle/>
+          <a:p>
+            <a:r>
               <a:rPr sz="1600" b="0">
                 <a:solidFill>
                   <a:srgbClr val="1F2D27"/>
                 </a:solidFill>
               </a:rPr>
-              <a:t>90 天试点计划：</a:t>
+              <a:t>●  以风险数据 + 农技规则库为上下文，生成个性化</a:t>
             </a:r>
           </a:p>
           <a:p>
@@ -5103,7 +5480,7 @@
                   <a:srgbClr val="1F2D27"/>
                 </a:solidFill>
               </a:rPr>
-              <a:t>●  对象：库区 1—2 家合作社 / 乡镇农技员（30—100 亩），现场两次 + 微信回访</a:t>
+              <a:t>     建议与自然语言追问</a:t>
             </a:r>
           </a:p>
           <a:p>
@@ -5113,7 +5490,7 @@
                   <a:srgbClr val="1F2D27"/>
                 </a:solidFill>
               </a:rPr>
-              <a:t>●  指标：越冬准备就绪率 ≥60%（越冬季主指标）｜采纳率 ≥50%（中重级不足 5 次则只报案例）</a:t>
+              <a:t>●  回答强制引用数据日期，抑制幻觉</a:t>
             </a:r>
           </a:p>
           <a:p>
@@ -5123,17 +5500,40 @@
                   <a:srgbClr val="1F2D27"/>
                 </a:solidFill>
               </a:rPr>
-              <a:t>        提示时效 ≥1 天｜满意度 ≥3.8｜续用意愿 ≥80%；n&lt;10 一律只报分子分母，不报百分比</a:t>
-            </a:r>
-          </a:p>
-          <a:p>
-            <a:r>
-              <a:rPr sz="1600" b="0">
-                <a:solidFill>
-                  <a:srgbClr val="1F2D27"/>
-                </a:solidFill>
-              </a:rPr>
-              <a:t>●  前置：与合作社/农技中心签一页纸《试用与责任约定》，外部性动作先确认才推送</a:t>
+              <a:t>●  LLM 只做转译与解释，不做数值预测</a:t>
+            </a:r>
+          </a:p>
+        </p:txBody>
+      </p:sp>
+      <p:sp>
+        <p:nvSpPr>
+          <p:cNvPr id="10" name="TextBox 9"/>
+          <p:cNvSpPr txBox="1"/>
+          <p:nvPr/>
+        </p:nvSpPr>
+        <p:spPr>
+          <a:xfrm>
+            <a:off x="640080" y="5394960"/>
+            <a:ext cx="10972800" cy="822960"/>
+          </a:xfrm>
+          <a:prstGeom prst="rect">
+            <a:avLst/>
+          </a:prstGeom>
+          <a:noFill/>
+        </p:spPr>
+        <p:txBody>
+          <a:bodyPr wrap="square">
+            <a:spAutoFit/>
+          </a:bodyPr>
+          <a:lstStyle/>
+          <a:p>
+            <a:r>
+              <a:rPr sz="1500" b="0">
+                <a:solidFill>
+                  <a:srgbClr val="6B7A72"/>
+                </a:solidFill>
+              </a:rPr>
+              <a:t>为什么不是「为了 AI 而 AI」：没有大模型时产品依然完整可用；大模型解决的是「同一份数据对不同用户的不同表述 + 追问」这一具体负担。</a:t>
             </a:r>
           </a:p>
         </p:txBody>
@@ -5209,7 +5609,7 @@
         <p:spPr>
           <a:xfrm>
             <a:off x="548640" y="320040"/>
-            <a:ext cx="1097280" cy="731520"/>
+            <a:ext cx="868680" cy="731520"/>
           </a:xfrm>
           <a:prstGeom prst="rect">
             <a:avLst/>
@@ -5228,7 +5628,7 @@
                   <a:srgbClr val="1A7A4A"/>
                 </a:solidFill>
               </a:rPr>
-              <a:t>05</a:t>
+              <a:t>04</a:t>
             </a:r>
           </a:p>
         </p:txBody>
@@ -5241,7 +5641,7 @@
         </p:nvSpPr>
         <p:spPr>
           <a:xfrm>
-            <a:off x="1371600" y="475488"/>
+            <a:off x="1508760" y="475488"/>
             <a:ext cx="10058400" cy="640080"/>
           </a:xfrm>
           <a:prstGeom prst="rect">
@@ -5261,7 +5661,7 @@
                   <a:srgbClr val="0E5233"/>
                 </a:solidFill>
               </a:rPr>
-              <a:t>可持续 · 开放 · 安全边界</a:t>
+              <a:t>验证：历史回测已通过，90 天试点已设计</a:t>
             </a:r>
           </a:p>
         </p:txBody>
@@ -5312,14 +5712,117 @@
       </p:sp>
       <p:sp>
         <p:nvSpPr>
-          <p:cNvPr id="6" name="TextBox 5"/>
+          <p:cNvPr id="6" name="Rectangle 5"/>
+          <p:cNvSpPr/>
+          <p:nvPr/>
+        </p:nvSpPr>
+        <p:spPr>
+          <a:xfrm>
+            <a:off x="640080" y="1554480"/>
+            <a:ext cx="10972800" cy="2377440"/>
+          </a:xfrm>
+          <a:prstGeom prst="rect">
+            <a:avLst/>
+          </a:prstGeom>
+          <a:solidFill>
+            <a:srgbClr val="EFF6F1"/>
+          </a:solidFill>
+          <a:ln>
+            <a:solidFill>
+              <a:srgbClr val="1A7A4A"/>
+            </a:solidFill>
+          </a:ln>
+          <a:effectLst/>
+        </p:spPr>
+        <p:style>
+          <a:lnRef idx="1">
+            <a:schemeClr val="accent1"/>
+          </a:lnRef>
+          <a:fillRef idx="3">
+            <a:schemeClr val="accent1"/>
+          </a:fillRef>
+          <a:effectRef idx="2">
+            <a:schemeClr val="accent1"/>
+          </a:effectRef>
+          <a:fontRef idx="minor">
+            <a:schemeClr val="lt1"/>
+          </a:fontRef>
+        </p:style>
+        <p:txBody>
+          <a:bodyPr rtlCol="0" anchor="ctr" wrap="square"/>
+          <a:lstStyle/>
+          <a:p>
+            <a:r>
+              <a:rPr sz="2000" b="1">
+                <a:solidFill>
+                  <a:srgbClr val="0E5233"/>
+                </a:solidFill>
+              </a:rPr>
+              <a:t>历史回测（2022 年热害 · 凉水河镇 · 真实数据）</a:t>
+            </a:r>
+          </a:p>
+          <a:p>
+            <a:r>
+              <a:rPr sz="1500">
+                <a:solidFill>
+                  <a:srgbClr val="1F2D27"/>
+                </a:solidFill>
+              </a:rPr>
+              <a:t>●  ≥35℃ 高温日 30 天    热害『重』级 13 天    极端最高 40.9℃（08-07）</a:t>
+            </a:r>
+          </a:p>
+          <a:p>
+            <a:r>
+              <a:rPr sz="1500">
+                <a:solidFill>
+                  <a:srgbClr val="1F2D27"/>
+                </a:solidFill>
+              </a:rPr>
+              <a:t>●  首个『重』级提示 2022-08-04（39.2℃）——比峰值提前 3 天；时效归因于单日 ≥39℃ 阈值，不记在连续升级头上</a:t>
+            </a:r>
+          </a:p>
+          <a:p>
+            <a:r>
+              <a:rPr sz="1500">
+                <a:solidFill>
+                  <a:srgbClr val="1F2D27"/>
+                </a:solidFill>
+              </a:rPr>
+              <a:t>●  干旱双口径同期『重』1 天／『中』55 天（重级需降水佐证），首个提示 2022-06-01（喂数带 35 天 warm-up，与产品一致）</a:t>
+            </a:r>
+          </a:p>
+          <a:p>
+            <a:r>
+              <a:rPr sz="1500">
+                <a:solidFill>
+                  <a:srgbClr val="1F2D27"/>
+                </a:solidFill>
+              </a:rPr>
+              <a:t>●  蒸散口径的增益点（逐日可复算）：2022-08 该周 4 天 def30 123–138mm 超膨大期 p99，其中 08-26 判『重』（当日雨30=29.9 使降水口径到中级、佐证成立），其余三天按佐证规则记『中』</a:t>
+            </a:r>
+          </a:p>
+          <a:p>
+            <a:r>
+              <a:rPr sz="1500">
+                <a:solidFill>
+                  <a:srgbClr val="1F2D27"/>
+                </a:solidFill>
+              </a:rPr>
+              <a:t>●  可离线复算：输入序列已冻结入库；对拍 + 边界用例 + 变异自证 + 材料一致性四道闸门全绿</a:t>
+            </a:r>
+          </a:p>
+        </p:txBody>
+      </p:sp>
+      <p:sp>
+        <p:nvSpPr>
+          <p:cNvPr id="7" name="TextBox 6"/>
           <p:cNvSpPr txBox="1"/>
           <p:nvPr/>
         </p:nvSpPr>
         <p:spPr>
           <a:xfrm>
-            <a:off x="640080" y="1645920"/>
-            <a:ext cx="5303520" cy="457200"/>
+            <a:off x="640080" y="4114800"/>
+            <a:ext cx="10972800" cy="2011680"/>
           </a:xfrm>
           <a:prstGeom prst="rect">
             <a:avLst/>
@@ -5333,234 +5836,62 @@
           <a:lstStyle/>
           <a:p>
             <a:r>
-              <a:rPr sz="2000" b="1">
-                <a:solidFill>
-                  <a:srgbClr val="0E5233"/>
-                </a:solidFill>
-              </a:rPr>
-              <a:t>可持续（12 个月，诚实选边）</a:t>
-            </a:r>
-          </a:p>
-        </p:txBody>
-      </p:sp>
-      <p:sp>
-        <p:nvSpPr>
-          <p:cNvPr id="7" name="TextBox 6"/>
-          <p:cNvSpPr txBox="1"/>
-          <p:nvPr/>
-        </p:nvSpPr>
-        <p:spPr>
-          <a:xfrm>
-            <a:off x="640080" y="2148840"/>
-            <a:ext cx="5303520" cy="2377440"/>
-          </a:xfrm>
-          <a:prstGeom prst="rect">
-            <a:avLst/>
-          </a:prstGeom>
-          <a:noFill/>
-        </p:spPr>
-        <p:txBody>
-          <a:bodyPr wrap="square">
-            <a:spAutoFit/>
-          </a:bodyPr>
-          <a:lstStyle/>
-          <a:p>
-            <a:r>
-              <a:rPr sz="1500" b="0">
+              <a:rPr sz="1400" b="0">
                 <a:solidFill>
                   <a:srgbClr val="1F2D27"/>
                 </a:solidFill>
               </a:rPr>
-              <a:t>●  12 个月内收入为 0——已选定赛道不追求收入</a:t>
-            </a:r>
-          </a:p>
-          <a:p>
-            <a:r>
-              <a:rPr sz="1500" b="0">
+              <a:t>90 天试点计划：</a:t>
+            </a:r>
+          </a:p>
+          <a:p>
+            <a:r>
+              <a:rPr sz="1400" b="0">
                 <a:solidFill>
                   <a:srgbClr val="1F2D27"/>
                 </a:solidFill>
               </a:rPr>
-              <a:t>●  定位：低成本公益基础设施 + 开源作品</a:t>
-            </a:r>
-          </a:p>
-          <a:p>
-            <a:r>
-              <a:rPr sz="1500" b="0">
+              <a:t>●  对象：库区 1—2 家合作社 / 乡镇农技员（30—100 亩），自费现场两次 + 微信回访（现金封顶 3400 元（补偿不能合规列支则降 2200））</a:t>
+            </a:r>
+          </a:p>
+          <a:p>
+            <a:r>
+              <a:rPr sz="1400" b="0">
                 <a:solidFill>
                   <a:srgbClr val="1F2D27"/>
                 </a:solidFill>
               </a:rPr>
-              <a:t>●  机制：赛事奖金／政府专项／基金会</a:t>
-            </a:r>
-          </a:p>
-          <a:p>
-            <a:r>
-              <a:rPr sz="1500" b="0">
+              <a:t>●  指标（n=2 户、13 周为例，全部写成分子/分母）：周活跃 ≥19/26 户·周｜越冬准备就绪率 ≥6/8</a:t>
+            </a:r>
+          </a:p>
+          <a:p>
+            <a:r>
+              <a:rPr sz="1400" b="0">
                 <a:solidFill>
                   <a:srgbClr val="1F2D27"/>
                 </a:solidFill>
               </a:rPr>
-              <a:t>     （当前均未申请；个人身份通常无申报资格）</a:t>
-            </a:r>
-          </a:p>
-          <a:p>
-            <a:r>
-              <a:rPr sz="1500" b="0">
+              <a:t>        采纳率 ≥5/10（中重级提示不足 5 次则只报案例）｜满意度 2/2 户均 ≥4 分｜续用意愿 2/2</a:t>
+            </a:r>
+          </a:p>
+          <a:p>
+            <a:r>
+              <a:rPr sz="1400" b="0">
                 <a:solidFill>
                   <a:srgbClr val="1F2D27"/>
                 </a:solidFill>
               </a:rPr>
-              <a:t>●  免费＝现有全部功能 + 无付费墙 + 可自部署</a:t>
-            </a:r>
-          </a:p>
-        </p:txBody>
-      </p:sp>
-      <p:sp>
-        <p:nvSpPr>
-          <p:cNvPr id="8" name="TextBox 7"/>
-          <p:cNvSpPr txBox="1"/>
-          <p:nvPr/>
-        </p:nvSpPr>
-        <p:spPr>
-          <a:xfrm>
-            <a:off x="6309360" y="1645920"/>
-            <a:ext cx="5303520" cy="457200"/>
-          </a:xfrm>
-          <a:prstGeom prst="rect">
-            <a:avLst/>
-          </a:prstGeom>
-          <a:noFill/>
-        </p:spPr>
-        <p:txBody>
-          <a:bodyPr wrap="square">
-            <a:spAutoFit/>
-          </a:bodyPr>
-          <a:lstStyle/>
-          <a:p>
-            <a:r>
-              <a:rPr sz="2000" b="1">
-                <a:solidFill>
-                  <a:srgbClr val="0E5233"/>
-                </a:solidFill>
-              </a:rPr>
-              <a:t>扩展与单点风险</a:t>
-            </a:r>
-          </a:p>
-        </p:txBody>
-      </p:sp>
-      <p:sp>
-        <p:nvSpPr>
-          <p:cNvPr id="9" name="TextBox 8"/>
-          <p:cNvSpPr txBox="1"/>
-          <p:nvPr/>
-        </p:nvSpPr>
-        <p:spPr>
-          <a:xfrm>
-            <a:off x="6309360" y="2148840"/>
-            <a:ext cx="5303520" cy="2377440"/>
-          </a:xfrm>
-          <a:prstGeom prst="rect">
-            <a:avLst/>
-          </a:prstGeom>
-          <a:noFill/>
-        </p:spPr>
-        <p:txBody>
-          <a:bodyPr wrap="square">
-            <a:spAutoFit/>
-          </a:bodyPr>
-          <a:lstStyle/>
-          <a:p>
-            <a:r>
-              <a:rPr sz="1500" b="0">
+              <a:t>●  判失败（事先写死）：周活跃 ≤14/26、或就绪 &lt;3/8、或任一户全程未打开 → 判未达核心目标</a:t>
+            </a:r>
+          </a:p>
+          <a:p>
+            <a:r>
+              <a:rPr sz="1400" b="0">
                 <a:solidFill>
                   <a:srgbClr val="1F2D27"/>
                 </a:solidFill>
               </a:rPr>
-              <a:t>●  同气候带柑橘产区＝弱复制（仍需当地校准）</a:t>
-            </a:r>
-          </a:p>
-          <a:p>
-            <a:r>
-              <a:rPr sz="1500" b="0">
-                <a:solidFill>
-                  <a:srgbClr val="1F2D27"/>
-                </a:solidFill>
-              </a:rPr>
-              <a:t>●  跨作物（茶园）＝强校准 5–15 人日／产区</a:t>
-            </a:r>
-          </a:p>
-          <a:p>
-            <a:r>
-              <a:rPr sz="1500" b="0">
-                <a:solidFill>
-                  <a:srgbClr val="1F2D27"/>
-                </a:solidFill>
-              </a:rPr>
-              <a:t>●  12 个月内只做丹江口一地</a:t>
-            </a:r>
-          </a:p>
-          <a:p>
-            <a:r>
-              <a:rPr sz="1500" b="0">
-                <a:solidFill>
-                  <a:srgbClr val="1F2D27"/>
-                </a:solidFill>
-              </a:rPr>
-              <a:t>●  bus factor＝1：暂无人承诺接手，故不自称</a:t>
-            </a:r>
-          </a:p>
-          <a:p>
-            <a:r>
-              <a:rPr sz="1500" b="0">
-                <a:solidFill>
-                  <a:srgbClr val="1F2D27"/>
-                </a:solidFill>
-              </a:rPr>
-              <a:t>     “可依赖的公共基础设施”</a:t>
-            </a:r>
-          </a:p>
-        </p:txBody>
-      </p:sp>
-      <p:sp>
-        <p:nvSpPr>
-          <p:cNvPr id="10" name="TextBox 9"/>
-          <p:cNvSpPr txBox="1"/>
-          <p:nvPr/>
-        </p:nvSpPr>
-        <p:spPr>
-          <a:xfrm>
-            <a:off x="640080" y="4846320"/>
-            <a:ext cx="10972800" cy="1188720"/>
-          </a:xfrm>
-          <a:prstGeom prst="rect">
-            <a:avLst/>
-          </a:prstGeom>
-          <a:noFill/>
-        </p:spPr>
-        <p:txBody>
-          <a:bodyPr wrap="square">
-            <a:spAutoFit/>
-          </a:bodyPr>
-          <a:lstStyle/>
-          <a:p>
-            <a:r>
-              <a:rPr sz="1400" b="0">
-                <a:solidFill>
-                  <a:srgbClr val="C0392B"/>
-                </a:solidFill>
-              </a:rPr>
-              <a:t>安全边界：风险等级用于辅助安排农事，不构成灾害预警，不替代官方气象预警与专业农技指导；再分析数据有不确定性，重要决策结合当地气象部门信息。</a:t>
-            </a:r>
-          </a:p>
-          <a:p>
-            <a:r>
-              <a:rPr sz="1400" b="0">
-                <a:solidFill>
-                  <a:srgbClr val="C0392B"/>
-                </a:solidFill>
-              </a:rPr>
-              <a:t>伦理：不采集个人身份信息；试点凭证（截图/照片）打码后本地留存，对外只给聚合统计，参与者可随时退出并要求删除。</a:t>
+              <a:t>●  前置：与合作社/农技中心签一页纸《试用与责任约定》（试点内部安排），外部性动作未确认不推送</a:t>
             </a:r>
           </a:p>
         </p:txBody>
@@ -5574,6 +5905,433 @@
 </file>
 
 <file path=ppt/slides/slide7.xml><?xml version="1.0" encoding="utf-8"?>
+<p:sld xmlns:a="http://schemas.openxmlformats.org/drawingml/2006/main" xmlns:p="http://schemas.openxmlformats.org/presentationml/2006/main" xmlns:r="http://schemas.openxmlformats.org/officeDocument/2006/relationships">
+  <p:cSld>
+    <p:spTree>
+      <p:nvGrpSpPr>
+        <p:cNvPr id="1" name=""/>
+        <p:cNvGrpSpPr/>
+        <p:nvPr/>
+      </p:nvGrpSpPr>
+      <p:grpSpPr/>
+      <p:sp>
+        <p:nvSpPr>
+          <p:cNvPr id="2" name="Rectangle 1"/>
+          <p:cNvSpPr/>
+          <p:nvPr/>
+        </p:nvSpPr>
+        <p:spPr>
+          <a:xfrm>
+            <a:off x="0" y="0"/>
+            <a:ext cx="12191695" cy="6858000"/>
+          </a:xfrm>
+          <a:prstGeom prst="rect">
+            <a:avLst/>
+          </a:prstGeom>
+          <a:solidFill>
+            <a:srgbClr val="FFFFFF"/>
+          </a:solidFill>
+          <a:ln>
+            <a:noFill/>
+          </a:ln>
+          <a:effectLst/>
+        </p:spPr>
+        <p:style>
+          <a:lnRef idx="1">
+            <a:schemeClr val="accent1"/>
+          </a:lnRef>
+          <a:fillRef idx="3">
+            <a:schemeClr val="accent1"/>
+          </a:fillRef>
+          <a:effectRef idx="2">
+            <a:schemeClr val="accent1"/>
+          </a:effectRef>
+          <a:fontRef idx="minor">
+            <a:schemeClr val="lt1"/>
+          </a:fontRef>
+        </p:style>
+        <p:txBody>
+          <a:bodyPr rtlCol="0" anchor="ctr"/>
+          <a:lstStyle/>
+          <a:p>
+            <a:pPr algn="ctr"/>
+          </a:p>
+        </p:txBody>
+      </p:sp>
+      <p:sp>
+        <p:nvSpPr>
+          <p:cNvPr id="3" name="TextBox 2"/>
+          <p:cNvSpPr txBox="1"/>
+          <p:nvPr/>
+        </p:nvSpPr>
+        <p:spPr>
+          <a:xfrm>
+            <a:off x="548640" y="320040"/>
+            <a:ext cx="868680" cy="731520"/>
+          </a:xfrm>
+          <a:prstGeom prst="rect">
+            <a:avLst/>
+          </a:prstGeom>
+          <a:noFill/>
+        </p:spPr>
+        <p:txBody>
+          <a:bodyPr wrap="square">
+            <a:spAutoFit/>
+          </a:bodyPr>
+          <a:lstStyle/>
+          <a:p>
+            <a:r>
+              <a:rPr sz="4000" b="1">
+                <a:solidFill>
+                  <a:srgbClr val="1A7A4A"/>
+                </a:solidFill>
+              </a:rPr>
+              <a:t>05</a:t>
+            </a:r>
+          </a:p>
+        </p:txBody>
+      </p:sp>
+      <p:sp>
+        <p:nvSpPr>
+          <p:cNvPr id="4" name="TextBox 3"/>
+          <p:cNvSpPr txBox="1"/>
+          <p:nvPr/>
+        </p:nvSpPr>
+        <p:spPr>
+          <a:xfrm>
+            <a:off x="1508760" y="475488"/>
+            <a:ext cx="10058400" cy="640080"/>
+          </a:xfrm>
+          <a:prstGeom prst="rect">
+            <a:avLst/>
+          </a:prstGeom>
+          <a:noFill/>
+        </p:spPr>
+        <p:txBody>
+          <a:bodyPr wrap="square">
+            <a:spAutoFit/>
+          </a:bodyPr>
+          <a:lstStyle/>
+          <a:p>
+            <a:r>
+              <a:rPr sz="2800" b="1">
+                <a:solidFill>
+                  <a:srgbClr val="0E5233"/>
+                </a:solidFill>
+              </a:rPr>
+              <a:t>可持续 · 开放 · 安全边界</a:t>
+            </a:r>
+          </a:p>
+        </p:txBody>
+      </p:sp>
+      <p:sp>
+        <p:nvSpPr>
+          <p:cNvPr id="5" name="Rectangle 4"/>
+          <p:cNvSpPr/>
+          <p:nvPr/>
+        </p:nvSpPr>
+        <p:spPr>
+          <a:xfrm>
+            <a:off x="594360" y="1170432"/>
+            <a:ext cx="2011680" cy="54864"/>
+          </a:xfrm>
+          <a:prstGeom prst="rect">
+            <a:avLst/>
+          </a:prstGeom>
+          <a:solidFill>
+            <a:srgbClr val="1A7A4A"/>
+          </a:solidFill>
+          <a:ln>
+            <a:noFill/>
+          </a:ln>
+          <a:effectLst/>
+        </p:spPr>
+        <p:style>
+          <a:lnRef idx="1">
+            <a:schemeClr val="accent1"/>
+          </a:lnRef>
+          <a:fillRef idx="3">
+            <a:schemeClr val="accent1"/>
+          </a:fillRef>
+          <a:effectRef idx="2">
+            <a:schemeClr val="accent1"/>
+          </a:effectRef>
+          <a:fontRef idx="minor">
+            <a:schemeClr val="lt1"/>
+          </a:fontRef>
+        </p:style>
+        <p:txBody>
+          <a:bodyPr rtlCol="0" anchor="ctr"/>
+          <a:lstStyle/>
+          <a:p>
+            <a:pPr algn="ctr"/>
+          </a:p>
+        </p:txBody>
+      </p:sp>
+      <p:sp>
+        <p:nvSpPr>
+          <p:cNvPr id="6" name="TextBox 5"/>
+          <p:cNvSpPr txBox="1"/>
+          <p:nvPr/>
+        </p:nvSpPr>
+        <p:spPr>
+          <a:xfrm>
+            <a:off x="640080" y="1645920"/>
+            <a:ext cx="5303520" cy="457200"/>
+          </a:xfrm>
+          <a:prstGeom prst="rect">
+            <a:avLst/>
+          </a:prstGeom>
+          <a:noFill/>
+        </p:spPr>
+        <p:txBody>
+          <a:bodyPr wrap="square">
+            <a:spAutoFit/>
+          </a:bodyPr>
+          <a:lstStyle/>
+          <a:p>
+            <a:r>
+              <a:rPr sz="2000" b="1">
+                <a:solidFill>
+                  <a:srgbClr val="0E5233"/>
+                </a:solidFill>
+              </a:rPr>
+              <a:t>可持续（12 个月，诚实选边）</a:t>
+            </a:r>
+          </a:p>
+        </p:txBody>
+      </p:sp>
+      <p:sp>
+        <p:nvSpPr>
+          <p:cNvPr id="7" name="TextBox 6"/>
+          <p:cNvSpPr txBox="1"/>
+          <p:nvPr/>
+        </p:nvSpPr>
+        <p:spPr>
+          <a:xfrm>
+            <a:off x="640080" y="2148840"/>
+            <a:ext cx="5303520" cy="2377440"/>
+          </a:xfrm>
+          <a:prstGeom prst="rect">
+            <a:avLst/>
+          </a:prstGeom>
+          <a:noFill/>
+        </p:spPr>
+        <p:txBody>
+          <a:bodyPr wrap="square">
+            <a:spAutoFit/>
+          </a:bodyPr>
+          <a:lstStyle/>
+          <a:p>
+            <a:r>
+              <a:rPr sz="1500" b="0">
+                <a:solidFill>
+                  <a:srgbClr val="1F2D27"/>
+                </a:solidFill>
+              </a:rPr>
+              <a:t>●  12 个月内收入为 0（含单次劳务），赛道不追求收入</a:t>
+            </a:r>
+          </a:p>
+          <a:p>
+            <a:r>
+              <a:rPr sz="1500" b="0">
+                <a:solidFill>
+                  <a:srgbClr val="1F2D27"/>
+                </a:solidFill>
+              </a:rPr>
+              <a:t>●  定位：可自助复算的开源作品 + 移交包（不自称公共基础设施）</a:t>
+            </a:r>
+          </a:p>
+          <a:p>
+            <a:r>
+              <a:rPr sz="1500" b="0">
+                <a:solidFill>
+                  <a:srgbClr val="1F2D27"/>
+                </a:solidFill>
+              </a:rPr>
+              <a:t>●  渠道：按举证标准逐条核对，当前结论为“暂无已核验渠道”</a:t>
+            </a:r>
+          </a:p>
+          <a:p>
+            <a:r>
+              <a:rPr sz="1500" b="0">
+                <a:solidFill>
+                  <a:srgbClr val="1F2D27"/>
+                </a:solidFill>
+              </a:rPr>
+              <a:t>     （赛事奖金是唯一确定存在但一次性的来源）</a:t>
+            </a:r>
+          </a:p>
+          <a:p>
+            <a:r>
+              <a:rPr sz="1500" b="0">
+                <a:solidFill>
+                  <a:srgbClr val="1F2D27"/>
+                </a:solidFill>
+              </a:rPr>
+              <a:t>●  免费＝现有全部功能 + 无付费墙 + 可自部署；成本与工时封顶</a:t>
+            </a:r>
+          </a:p>
+        </p:txBody>
+      </p:sp>
+      <p:sp>
+        <p:nvSpPr>
+          <p:cNvPr id="8" name="TextBox 7"/>
+          <p:cNvSpPr txBox="1"/>
+          <p:nvPr/>
+        </p:nvSpPr>
+        <p:spPr>
+          <a:xfrm>
+            <a:off x="6309360" y="1645920"/>
+            <a:ext cx="5303520" cy="457200"/>
+          </a:xfrm>
+          <a:prstGeom prst="rect">
+            <a:avLst/>
+          </a:prstGeom>
+          <a:noFill/>
+        </p:spPr>
+        <p:txBody>
+          <a:bodyPr wrap="square">
+            <a:spAutoFit/>
+          </a:bodyPr>
+          <a:lstStyle/>
+          <a:p>
+            <a:r>
+              <a:rPr sz="2000" b="1">
+                <a:solidFill>
+                  <a:srgbClr val="0E5233"/>
+                </a:solidFill>
+              </a:rPr>
+              <a:t>扩展与单点风险</a:t>
+            </a:r>
+          </a:p>
+        </p:txBody>
+      </p:sp>
+      <p:sp>
+        <p:nvSpPr>
+          <p:cNvPr id="9" name="TextBox 8"/>
+          <p:cNvSpPr txBox="1"/>
+          <p:nvPr/>
+        </p:nvSpPr>
+        <p:spPr>
+          <a:xfrm>
+            <a:off x="6309360" y="2148840"/>
+            <a:ext cx="5303520" cy="2377440"/>
+          </a:xfrm>
+          <a:prstGeom prst="rect">
+            <a:avLst/>
+          </a:prstGeom>
+          <a:noFill/>
+        </p:spPr>
+        <p:txBody>
+          <a:bodyPr wrap="square">
+            <a:spAutoFit/>
+          </a:bodyPr>
+          <a:lstStyle/>
+          <a:p>
+            <a:r>
+              <a:rPr sz="1500" b="0">
+                <a:solidFill>
+                  <a:srgbClr val="1F2D27"/>
+                </a:solidFill>
+              </a:rPr>
+              <a:t>●  同气候带柑橘产区＝弱复制（仍需当地校准）</a:t>
+            </a:r>
+          </a:p>
+          <a:p>
+            <a:r>
+              <a:rPr sz="1500" b="0">
+                <a:solidFill>
+                  <a:srgbClr val="1F2D27"/>
+                </a:solidFill>
+              </a:rPr>
+              <a:t>●  跨作物（茶园）＝强校准 5–15 人日／产区</a:t>
+            </a:r>
+          </a:p>
+          <a:p>
+            <a:r>
+              <a:rPr sz="1500" b="0">
+                <a:solidFill>
+                  <a:srgbClr val="1F2D27"/>
+                </a:solidFill>
+              </a:rPr>
+              <a:t>●  12 个月内只做丹江口一地</a:t>
+            </a:r>
+          </a:p>
+          <a:p>
+            <a:r>
+              <a:rPr sz="1500" b="0">
+                <a:solidFill>
+                  <a:srgbClr val="1F2D27"/>
+                </a:solidFill>
+              </a:rPr>
+              <a:t>●  bus factor＝1：暂无人承诺接手，故不自称</a:t>
+            </a:r>
+          </a:p>
+          <a:p>
+            <a:r>
+              <a:rPr sz="1500" b="0">
+                <a:solidFill>
+                  <a:srgbClr val="1F2D27"/>
+                </a:solidFill>
+              </a:rPr>
+              <a:t>     “可依赖的公共基础设施”</a:t>
+            </a:r>
+          </a:p>
+        </p:txBody>
+      </p:sp>
+      <p:sp>
+        <p:nvSpPr>
+          <p:cNvPr id="10" name="TextBox 9"/>
+          <p:cNvSpPr txBox="1"/>
+          <p:nvPr/>
+        </p:nvSpPr>
+        <p:spPr>
+          <a:xfrm>
+            <a:off x="640080" y="4846320"/>
+            <a:ext cx="10972800" cy="1188720"/>
+          </a:xfrm>
+          <a:prstGeom prst="rect">
+            <a:avLst/>
+          </a:prstGeom>
+          <a:noFill/>
+        </p:spPr>
+        <p:txBody>
+          <a:bodyPr wrap="square">
+            <a:spAutoFit/>
+          </a:bodyPr>
+          <a:lstStyle/>
+          <a:p>
+            <a:r>
+              <a:rPr sz="1400" b="0">
+                <a:solidFill>
+                  <a:srgbClr val="C0392B"/>
+                </a:solidFill>
+              </a:rPr>
+              <a:t>安全边界：风险等级用于辅助安排农事，不构成灾害预警，不替代官方气象预警与专业农技指导；再分析数据有不确定性，重要决策结合当地气象部门信息。</a:t>
+            </a:r>
+          </a:p>
+          <a:p>
+            <a:r>
+              <a:rPr sz="1400" b="0">
+                <a:solidFill>
+                  <a:srgbClr val="C0392B"/>
+                </a:solidFill>
+              </a:rPr>
+              <a:t>伦理：不采集个人身份信息；试点凭证（截图/照片）打码后本地留存，对外只给聚合统计，参与者可随时退出并要求删除。</a:t>
+            </a:r>
+          </a:p>
+        </p:txBody>
+      </p:sp>
+    </p:spTree>
+  </p:cSld>
+  <p:clrMapOvr>
+    <a:masterClrMapping/>
+  </p:clrMapOvr>
+</p:sld>
+</file>
+
+<file path=ppt/slides/slide8.xml><?xml version="1.0" encoding="utf-8"?>
 <p:sld xmlns:a="http://schemas.openxmlformats.org/drawingml/2006/main" xmlns:p="http://schemas.openxmlformats.org/presentationml/2006/main" xmlns:r="http://schemas.openxmlformats.org/officeDocument/2006/relationships">
   <p:cSld>
     <p:spTree>

--- a/丹橘知旱-参赛PPT.pptx
+++ b/丹橘知旱-参赛PPT.pptx
@@ -5076,7 +5076,7 @@
                   <a:srgbClr val="1F2D27"/>
                 </a:solidFill>
               </a:rPr>
-              <a:t>·  85 秒演示视频：1080p，配音＋字幕</a:t>
+              <a:t>·  175 秒演示视频：1080p，配音＋字幕</a:t>
             </a:r>
           </a:p>
           <a:p>

--- a/丹橘知旱-参赛PPT.pptx
+++ b/丹橘知旱-参赛PPT.pptx
@@ -6129,7 +6129,7 @@
                   <a:srgbClr val="1F2D27"/>
                 </a:solidFill>
               </a:rPr>
-              <a:t>●  12 个月内收入为 0（含单次劳务），赛道不追求收入</a:t>
+              <a:t>●  全公益产品：永久免费、无付费墙、可自部署，不做任何商业化（含远期）</a:t>
             </a:r>
           </a:p>
           <a:p>
@@ -6149,7 +6149,7 @@
                   <a:srgbClr val="1F2D27"/>
                 </a:solidFill>
               </a:rPr>
-              <a:t>●  渠道：按举证标准逐条核对，当前结论为“暂无已核验渠道”</a:t>
+              <a:t>●  资金：除一次性赛事奖金外无外部资金；全公益与</a:t>
             </a:r>
           </a:p>
           <a:p>
@@ -6159,7 +6159,7 @@
                   <a:srgbClr val="1F2D27"/>
                 </a:solidFill>
               </a:rPr>
-              <a:t>     （赛事奖金是唯一确定存在但一次性的来源）</a:t>
+              <a:t>     Open-Meteo 非商业数据许可永久自洽</a:t>
             </a:r>
           </a:p>
           <a:p>
@@ -6169,7 +6169,17 @@
                   <a:srgbClr val="1F2D27"/>
                 </a:solidFill>
               </a:rPr>
-              <a:t>●  免费＝现有全部功能 + 无付费墙 + 可自部署；成本与工时封顶</a:t>
+              <a:t>●  成本模型：纯静态零服务器成本；试点现金封顶 3400 元、</a:t>
+            </a:r>
+          </a:p>
+          <a:p>
+            <a:r>
+              <a:rPr sz="1500" b="0">
+                <a:solidFill>
+                  <a:srgbClr val="1F2D27"/>
+                </a:solidFill>
+              </a:rPr>
+              <a:t>     工时 85–95 小时，写有超支砍序与退出触发</a:t>
             </a:r>
           </a:p>
         </p:txBody>

--- a/丹橘知旱-参赛PPT.pptx
+++ b/丹橘知旱-参赛PPT.pptx
@@ -13,6 +13,9 @@
     <p:sldId id="261" r:id="rId12"/>
     <p:sldId id="262" r:id="rId13"/>
     <p:sldId id="263" r:id="rId14"/>
+    <p:sldId id="264" r:id="rId15"/>
+    <p:sldId id="265" r:id="rId16"/>
+    <p:sldId id="266" r:id="rId17"/>
   </p:sldIdLst>
   <p:sldSz cx="12191695" cy="6858000" type="screen4x3"/>
   <p:notesSz cx="6858000" cy="9144000"/>
@@ -3421,6 +3424,687 @@
 </p:sld>
 </file>
 
+<file path=ppt/slides/slide10.xml><?xml version="1.0" encoding="utf-8"?>
+<p:sld xmlns:a="http://schemas.openxmlformats.org/drawingml/2006/main" xmlns:p="http://schemas.openxmlformats.org/presentationml/2006/main" xmlns:r="http://schemas.openxmlformats.org/officeDocument/2006/relationships">
+  <p:cSld>
+    <p:spTree>
+      <p:nvGrpSpPr>
+        <p:cNvPr id="1" name=""/>
+        <p:cNvGrpSpPr/>
+        <p:nvPr/>
+      </p:nvGrpSpPr>
+      <p:grpSpPr/>
+      <p:sp>
+        <p:nvSpPr>
+          <p:cNvPr id="2" name="Rectangle 1"/>
+          <p:cNvSpPr/>
+          <p:nvPr/>
+        </p:nvSpPr>
+        <p:spPr>
+          <a:xfrm>
+            <a:off x="0" y="0"/>
+            <a:ext cx="12191695" cy="6858000"/>
+          </a:xfrm>
+          <a:prstGeom prst="rect">
+            <a:avLst/>
+          </a:prstGeom>
+          <a:solidFill>
+            <a:srgbClr val="FFFFFF"/>
+          </a:solidFill>
+          <a:ln>
+            <a:noFill/>
+          </a:ln>
+          <a:effectLst/>
+        </p:spPr>
+        <p:style>
+          <a:lnRef idx="1">
+            <a:schemeClr val="accent1"/>
+          </a:lnRef>
+          <a:fillRef idx="3">
+            <a:schemeClr val="accent1"/>
+          </a:fillRef>
+          <a:effectRef idx="2">
+            <a:schemeClr val="accent1"/>
+          </a:effectRef>
+          <a:fontRef idx="minor">
+            <a:schemeClr val="lt1"/>
+          </a:fontRef>
+        </p:style>
+        <p:txBody>
+          <a:bodyPr rtlCol="0" anchor="ctr"/>
+          <a:lstStyle/>
+          <a:p>
+            <a:pPr algn="ctr"/>
+          </a:p>
+        </p:txBody>
+      </p:sp>
+      <p:sp>
+        <p:nvSpPr>
+          <p:cNvPr id="3" name="TextBox 2"/>
+          <p:cNvSpPr txBox="1"/>
+          <p:nvPr/>
+        </p:nvSpPr>
+        <p:spPr>
+          <a:xfrm>
+            <a:off x="548640" y="320040"/>
+            <a:ext cx="868680" cy="731520"/>
+          </a:xfrm>
+          <a:prstGeom prst="rect">
+            <a:avLst/>
+          </a:prstGeom>
+          <a:noFill/>
+        </p:spPr>
+        <p:txBody>
+          <a:bodyPr wrap="square">
+            <a:spAutoFit/>
+          </a:bodyPr>
+          <a:lstStyle/>
+          <a:p>
+            <a:r>
+              <a:rPr sz="4000" b="1">
+                <a:solidFill>
+                  <a:srgbClr val="1A7A4A"/>
+                </a:solidFill>
+              </a:rPr>
+              <a:t>08</a:t>
+            </a:r>
+          </a:p>
+        </p:txBody>
+      </p:sp>
+      <p:sp>
+        <p:nvSpPr>
+          <p:cNvPr id="4" name="TextBox 3"/>
+          <p:cNvSpPr txBox="1"/>
+          <p:nvPr/>
+        </p:nvSpPr>
+        <p:spPr>
+          <a:xfrm>
+            <a:off x="1508760" y="475488"/>
+            <a:ext cx="10058400" cy="640080"/>
+          </a:xfrm>
+          <a:prstGeom prst="rect">
+            <a:avLst/>
+          </a:prstGeom>
+          <a:noFill/>
+        </p:spPr>
+        <p:txBody>
+          <a:bodyPr wrap="square">
+            <a:spAutoFit/>
+          </a:bodyPr>
+          <a:lstStyle/>
+          <a:p>
+            <a:r>
+              <a:rPr sz="2800" b="1">
+                <a:solidFill>
+                  <a:srgbClr val="0E5233"/>
+                </a:solidFill>
+              </a:rPr>
+              <a:t>90 天试点：逐周节奏与判据（事先写死，不临场决定）</a:t>
+            </a:r>
+          </a:p>
+        </p:txBody>
+      </p:sp>
+      <p:sp>
+        <p:nvSpPr>
+          <p:cNvPr id="5" name="Rectangle 4"/>
+          <p:cNvSpPr/>
+          <p:nvPr/>
+        </p:nvSpPr>
+        <p:spPr>
+          <a:xfrm>
+            <a:off x="594360" y="1170432"/>
+            <a:ext cx="2011680" cy="54864"/>
+          </a:xfrm>
+          <a:prstGeom prst="rect">
+            <a:avLst/>
+          </a:prstGeom>
+          <a:solidFill>
+            <a:srgbClr val="1A7A4A"/>
+          </a:solidFill>
+          <a:ln>
+            <a:noFill/>
+          </a:ln>
+          <a:effectLst/>
+        </p:spPr>
+        <p:style>
+          <a:lnRef idx="1">
+            <a:schemeClr val="accent1"/>
+          </a:lnRef>
+          <a:fillRef idx="3">
+            <a:schemeClr val="accent1"/>
+          </a:fillRef>
+          <a:effectRef idx="2">
+            <a:schemeClr val="accent1"/>
+          </a:effectRef>
+          <a:fontRef idx="minor">
+            <a:schemeClr val="lt1"/>
+          </a:fontRef>
+        </p:style>
+        <p:txBody>
+          <a:bodyPr rtlCol="0" anchor="ctr"/>
+          <a:lstStyle/>
+          <a:p>
+            <a:pPr algn="ctr"/>
+          </a:p>
+        </p:txBody>
+      </p:sp>
+      <p:sp>
+        <p:nvSpPr>
+          <p:cNvPr id="6" name="TextBox 5"/>
+          <p:cNvSpPr txBox="1"/>
+          <p:nvPr/>
+        </p:nvSpPr>
+        <p:spPr>
+          <a:xfrm>
+            <a:off x="640080" y="1600200"/>
+            <a:ext cx="5303520" cy="457200"/>
+          </a:xfrm>
+          <a:prstGeom prst="rect">
+            <a:avLst/>
+          </a:prstGeom>
+          <a:noFill/>
+        </p:spPr>
+        <p:txBody>
+          <a:bodyPr wrap="square">
+            <a:spAutoFit/>
+          </a:bodyPr>
+          <a:lstStyle/>
+          <a:p>
+            <a:r>
+              <a:rPr sz="2000" b="1">
+                <a:solidFill>
+                  <a:srgbClr val="0E5233"/>
+                </a:solidFill>
+              </a:rPr>
+              <a:t>逐周节奏（按柑橘农时）</a:t>
+            </a:r>
+          </a:p>
+        </p:txBody>
+      </p:sp>
+      <p:sp>
+        <p:nvSpPr>
+          <p:cNvPr id="7" name="TextBox 6"/>
+          <p:cNvSpPr txBox="1"/>
+          <p:nvPr/>
+        </p:nvSpPr>
+        <p:spPr>
+          <a:xfrm>
+            <a:off x="640080" y="2103120"/>
+            <a:ext cx="5303520" cy="2743200"/>
+          </a:xfrm>
+          <a:prstGeom prst="rect">
+            <a:avLst/>
+          </a:prstGeom>
+          <a:noFill/>
+        </p:spPr>
+        <p:txBody>
+          <a:bodyPr wrap="square">
+            <a:spAutoFit/>
+          </a:bodyPr>
+          <a:lstStyle/>
+          <a:p>
+            <a:r>
+              <a:rPr sz="1500" b="0">
+                <a:solidFill>
+                  <a:srgbClr val="1F2D27"/>
+                </a:solidFill>
+              </a:rPr>
+              <a:t>●  第 1–2 周（11 月）：签约 · 装园块 · 记基线</a:t>
+            </a:r>
+          </a:p>
+          <a:p>
+            <a:r>
+              <a:rPr sz="1500" b="0">
+                <a:solidFill>
+                  <a:srgbClr val="1F2D27"/>
+                </a:solidFill>
+              </a:rPr>
+              <a:t>●  第 3–10 周：试用 · 周报 · 隔周阈值校准</a:t>
+            </a:r>
+          </a:p>
+          <a:p>
+            <a:r>
+              <a:rPr sz="1500" b="0">
+                <a:solidFill>
+                  <a:srgbClr val="1F2D27"/>
+                </a:solidFill>
+              </a:rPr>
+              <a:t>●  第 11–13 周（1 月）：回访 · 复盘 · 出报告</a:t>
+            </a:r>
+          </a:p>
+          <a:p>
+            <a:r>
+              <a:rPr sz="1500" b="0">
+                <a:solidFill>
+                  <a:srgbClr val="1F2D27"/>
+                </a:solidFill>
+              </a:rPr>
+              <a:t>●  覆盖两个风险过程：越冬冻害（11–12 月）</a:t>
+            </a:r>
+          </a:p>
+          <a:p>
+            <a:r>
+              <a:rPr sz="1500" b="0">
+                <a:solidFill>
+                  <a:srgbClr val="1F2D27"/>
+                </a:solidFill>
+              </a:rPr>
+              <a:t>     与倒春寒窗口（3–4 月，复盘后跟踪）</a:t>
+            </a:r>
+          </a:p>
+          <a:p>
+            <a:r>
+              <a:rPr sz="1500" b="0">
+                <a:solidFill>
+                  <a:srgbClr val="1F2D27"/>
+                </a:solidFill>
+              </a:rPr>
+              <a:t>●  每周五登记 LLM 用量截图（封顶 100 元，</a:t>
+            </a:r>
+          </a:p>
+          <a:p>
+            <a:r>
+              <a:rPr sz="1500" b="0">
+                <a:solidFill>
+                  <a:srgbClr val="1F2D27"/>
+                </a:solidFill>
+              </a:rPr>
+              <a:t>     累计 50 元触发砍序停用）</a:t>
+            </a:r>
+          </a:p>
+        </p:txBody>
+      </p:sp>
+      <p:sp>
+        <p:nvSpPr>
+          <p:cNvPr id="8" name="TextBox 7"/>
+          <p:cNvSpPr txBox="1"/>
+          <p:nvPr/>
+        </p:nvSpPr>
+        <p:spPr>
+          <a:xfrm>
+            <a:off x="6309360" y="1600200"/>
+            <a:ext cx="5303520" cy="457200"/>
+          </a:xfrm>
+          <a:prstGeom prst="rect">
+            <a:avLst/>
+          </a:prstGeom>
+          <a:noFill/>
+        </p:spPr>
+        <p:txBody>
+          <a:bodyPr wrap="square">
+            <a:spAutoFit/>
+          </a:bodyPr>
+          <a:lstStyle/>
+          <a:p>
+            <a:r>
+              <a:rPr sz="2000" b="1">
+                <a:solidFill>
+                  <a:srgbClr val="0E5233"/>
+                </a:solidFill>
+              </a:rPr>
+              <a:t>证据规则（防自证）</a:t>
+            </a:r>
+          </a:p>
+        </p:txBody>
+      </p:sp>
+      <p:sp>
+        <p:nvSpPr>
+          <p:cNvPr id="9" name="TextBox 8"/>
+          <p:cNvSpPr txBox="1"/>
+          <p:nvPr/>
+        </p:nvSpPr>
+        <p:spPr>
+          <a:xfrm>
+            <a:off x="6309360" y="2103120"/>
+            <a:ext cx="5303520" cy="2743200"/>
+          </a:xfrm>
+          <a:prstGeom prst="rect">
+            <a:avLst/>
+          </a:prstGeom>
+          <a:noFill/>
+        </p:spPr>
+        <p:txBody>
+          <a:bodyPr wrap="square">
+            <a:spAutoFit/>
+          </a:bodyPr>
+          <a:lstStyle/>
+          <a:p>
+            <a:r>
+              <a:rPr sz="1500" b="0">
+                <a:solidFill>
+                  <a:srgbClr val="1F2D27"/>
+                </a:solidFill>
+              </a:rPr>
+              <a:t>●  采纳率要有凭证：涂白照片/农资单据/灌水记录，</a:t>
+            </a:r>
+          </a:p>
+          <a:p>
+            <a:r>
+              <a:rPr sz="1500" b="0">
+                <a:solidFill>
+                  <a:srgbClr val="1F2D27"/>
+                </a:solidFill>
+              </a:rPr>
+              <a:t>     时效取两个具体日期</a:t>
+            </a:r>
+          </a:p>
+          <a:p>
+            <a:r>
+              <a:rPr sz="1500" b="0">
+                <a:solidFill>
+                  <a:srgbClr val="1F2D27"/>
+                </a:solidFill>
+              </a:rPr>
+              <a:t>●  n&lt;10 只报分子分母，不做比例宣传</a:t>
+            </a:r>
+          </a:p>
+          <a:p>
+            <a:r>
+              <a:rPr sz="1500" b="0">
+                <a:solidFill>
+                  <a:srgbClr val="1F2D27"/>
+                </a:solidFill>
+              </a:rPr>
+              <a:t>●  历史回放评估定性为「意向/演练」，</a:t>
+            </a:r>
+          </a:p>
+          <a:p>
+            <a:r>
+              <a:rPr sz="1500" b="0">
+                <a:solidFill>
+                  <a:srgbClr val="1F2D27"/>
+                </a:solidFill>
+              </a:rPr>
+              <a:t>     与真实采纳率分开呈现</a:t>
+            </a:r>
+          </a:p>
+          <a:p>
+            <a:r>
+              <a:rPr sz="1500" b="0">
+                <a:solidFill>
+                  <a:srgbClr val="1F2D27"/>
+                </a:solidFill>
+              </a:rPr>
+              <a:t>●  周活跃连续 6 周零活跃、确认回路零响应</a:t>
+            </a:r>
+          </a:p>
+          <a:p>
+            <a:r>
+              <a:rPr sz="1500" b="0">
+                <a:solidFill>
+                  <a:srgbClr val="1F2D27"/>
+                </a:solidFill>
+              </a:rPr>
+              <a:t>     → 退出触发，90 天停服横幅 + 归档</a:t>
+            </a:r>
+          </a:p>
+          <a:p>
+            <a:r>
+              <a:rPr sz="1500" b="0">
+                <a:solidFill>
+                  <a:srgbClr val="1F2D27"/>
+                </a:solidFill>
+              </a:rPr>
+              <a:t>●  「请求已发出且留痕、对方不签」才按</a:t>
+            </a:r>
+          </a:p>
+          <a:p>
+            <a:r>
+              <a:rPr sz="1500" b="0">
+                <a:solidFill>
+                  <a:srgbClr val="1F2D27"/>
+                </a:solidFill>
+              </a:rPr>
+              <a:t>     需求侧证据处理</a:t>
+            </a:r>
+          </a:p>
+        </p:txBody>
+      </p:sp>
+      <p:sp>
+        <p:nvSpPr>
+          <p:cNvPr id="10" name="TextBox 9"/>
+          <p:cNvSpPr txBox="1"/>
+          <p:nvPr/>
+        </p:nvSpPr>
+        <p:spPr>
+          <a:xfrm>
+            <a:off x="640080" y="5212080"/>
+            <a:ext cx="10972800" cy="822960"/>
+          </a:xfrm>
+          <a:prstGeom prst="rect">
+            <a:avLst/>
+          </a:prstGeom>
+          <a:noFill/>
+        </p:spPr>
+        <p:txBody>
+          <a:bodyPr wrap="square">
+            <a:spAutoFit/>
+          </a:bodyPr>
+          <a:lstStyle/>
+          <a:p>
+            <a:r>
+              <a:rPr sz="1400" b="0">
+                <a:solidFill>
+                  <a:srgbClr val="C0392B"/>
+                </a:solidFill>
+              </a:rPr>
+              <a:t>试点现金封顶 3400 元（误工补偿无法合规列支则自动降至 2200 元）+ 项目人工时 85–95 小时，全部写有超支砍序与退出触发；逐周台账落在 docs/04，复盘时公开。</a:t>
+            </a:r>
+          </a:p>
+        </p:txBody>
+      </p:sp>
+    </p:spTree>
+  </p:cSld>
+  <p:clrMapOvr>
+    <a:masterClrMapping/>
+  </p:clrMapOvr>
+</p:sld>
+</file>
+
+<file path=ppt/slides/slide11.xml><?xml version="1.0" encoding="utf-8"?>
+<p:sld xmlns:a="http://schemas.openxmlformats.org/drawingml/2006/main" xmlns:p="http://schemas.openxmlformats.org/presentationml/2006/main" xmlns:r="http://schemas.openxmlformats.org/officeDocument/2006/relationships">
+  <p:cSld>
+    <p:spTree>
+      <p:nvGrpSpPr>
+        <p:cNvPr id="1" name=""/>
+        <p:cNvGrpSpPr/>
+        <p:nvPr/>
+      </p:nvGrpSpPr>
+      <p:grpSpPr/>
+      <p:sp>
+        <p:nvSpPr>
+          <p:cNvPr id="2" name="Rectangle 1"/>
+          <p:cNvSpPr/>
+          <p:nvPr/>
+        </p:nvSpPr>
+        <p:spPr>
+          <a:xfrm>
+            <a:off x="0" y="0"/>
+            <a:ext cx="12191695" cy="6858000"/>
+          </a:xfrm>
+          <a:prstGeom prst="rect">
+            <a:avLst/>
+          </a:prstGeom>
+          <a:solidFill>
+            <a:srgbClr val="0E5233"/>
+          </a:solidFill>
+          <a:ln>
+            <a:noFill/>
+          </a:ln>
+          <a:effectLst/>
+        </p:spPr>
+        <p:style>
+          <a:lnRef idx="1">
+            <a:schemeClr val="accent1"/>
+          </a:lnRef>
+          <a:fillRef idx="3">
+            <a:schemeClr val="accent1"/>
+          </a:fillRef>
+          <a:effectRef idx="2">
+            <a:schemeClr val="accent1"/>
+          </a:effectRef>
+          <a:fontRef idx="minor">
+            <a:schemeClr val="lt1"/>
+          </a:fontRef>
+        </p:style>
+        <p:txBody>
+          <a:bodyPr rtlCol="0" anchor="ctr"/>
+          <a:lstStyle/>
+          <a:p>
+            <a:pPr algn="ctr"/>
+          </a:p>
+        </p:txBody>
+      </p:sp>
+      <p:sp>
+        <p:nvSpPr>
+          <p:cNvPr id="3" name="TextBox 2"/>
+          <p:cNvSpPr txBox="1"/>
+          <p:nvPr/>
+        </p:nvSpPr>
+        <p:spPr>
+          <a:xfrm>
+            <a:off x="914400" y="2194560"/>
+            <a:ext cx="10332720" cy="914400"/>
+          </a:xfrm>
+          <a:prstGeom prst="rect">
+            <a:avLst/>
+          </a:prstGeom>
+          <a:noFill/>
+        </p:spPr>
+        <p:txBody>
+          <a:bodyPr wrap="square">
+            <a:spAutoFit/>
+          </a:bodyPr>
+          <a:lstStyle/>
+          <a:p>
+            <a:r>
+              <a:rPr sz="4400" b="1">
+                <a:solidFill>
+                  <a:srgbClr val="FFFFFF"/>
+                </a:solidFill>
+              </a:rPr>
+              <a:t>沧浪舟</a:t>
+            </a:r>
+          </a:p>
+        </p:txBody>
+      </p:sp>
+      <p:sp>
+        <p:nvSpPr>
+          <p:cNvPr id="4" name="TextBox 3"/>
+          <p:cNvSpPr txBox="1"/>
+          <p:nvPr/>
+        </p:nvSpPr>
+        <p:spPr>
+          <a:xfrm>
+            <a:off x="914400" y="3291840"/>
+            <a:ext cx="10332720" cy="548640"/>
+          </a:xfrm>
+          <a:prstGeom prst="rect">
+            <a:avLst/>
+          </a:prstGeom>
+          <a:noFill/>
+        </p:spPr>
+        <p:txBody>
+          <a:bodyPr wrap="square">
+            <a:spAutoFit/>
+          </a:bodyPr>
+          <a:lstStyle/>
+          <a:p>
+            <a:r>
+              <a:rPr sz="1800" b="0">
+                <a:solidFill>
+                  <a:srgbClr val="CFE6D8"/>
+                </a:solidFill>
+              </a:rPr>
+              <a:t>个人参赛 · 2026 年 10 月</a:t>
+            </a:r>
+          </a:p>
+        </p:txBody>
+      </p:sp>
+      <p:sp>
+        <p:nvSpPr>
+          <p:cNvPr id="5" name="TextBox 4"/>
+          <p:cNvSpPr txBox="1"/>
+          <p:nvPr/>
+        </p:nvSpPr>
+        <p:spPr>
+          <a:xfrm>
+            <a:off x="914400" y="4206240"/>
+            <a:ext cx="10332720" cy="1097280"/>
+          </a:xfrm>
+          <a:prstGeom prst="rect">
+            <a:avLst/>
+          </a:prstGeom>
+          <a:noFill/>
+        </p:spPr>
+        <p:txBody>
+          <a:bodyPr wrap="square">
+            <a:spAutoFit/>
+          </a:bodyPr>
+          <a:lstStyle/>
+          <a:p>
+            <a:r>
+              <a:rPr sz="2000" b="0">
+                <a:solidFill>
+                  <a:srgbClr val="FFFFFF"/>
+                </a:solidFill>
+              </a:rPr>
+              <a:t>把一个真实问题带来，让 AI 真正去解决它。</a:t>
+            </a:r>
+          </a:p>
+          <a:p>
+            <a:r>
+              <a:rPr sz="2000" b="0">
+                <a:solidFill>
+                  <a:srgbClr val="FFFFFF"/>
+                </a:solidFill>
+              </a:rPr>
+              <a:t>一个地方。一个气候问题。一个 AI 解决方案。</a:t>
+            </a:r>
+          </a:p>
+        </p:txBody>
+      </p:sp>
+      <p:sp>
+        <p:nvSpPr>
+          <p:cNvPr id="6" name="TextBox 5"/>
+          <p:cNvSpPr txBox="1"/>
+          <p:nvPr/>
+        </p:nvSpPr>
+        <p:spPr>
+          <a:xfrm>
+            <a:off x="914400" y="5760720"/>
+            <a:ext cx="10332720" cy="457200"/>
+          </a:xfrm>
+          <a:prstGeom prst="rect">
+            <a:avLst/>
+          </a:prstGeom>
+          <a:noFill/>
+        </p:spPr>
+        <p:txBody>
+          <a:bodyPr wrap="square">
+            <a:spAutoFit/>
+          </a:bodyPr>
+          <a:lstStyle/>
+          <a:p>
+            <a:r>
+              <a:rPr sz="1300" b="0">
+                <a:solidFill>
+                  <a:srgbClr val="CFE6D8"/>
+                </a:solidFill>
+              </a:rPr>
+              <a:t>ai4climate.world ｜ pawnnwap.github.io/danju-zhihan ｜ deepseek.club/topic/5043</a:t>
+            </a:r>
+          </a:p>
+        </p:txBody>
+      </p:sp>
+    </p:spTree>
+  </p:cSld>
+  <p:clrMapOvr>
+    <a:masterClrMapping/>
+  </p:clrMapOvr>
+</p:sld>
+</file>
+
 <file path=ppt/slides/slide2.xml><?xml version="1.0" encoding="utf-8"?>
 <p:sld xmlns:a="http://schemas.openxmlformats.org/drawingml/2006/main" xmlns:p="http://schemas.openxmlformats.org/presentationml/2006/main" xmlns:r="http://schemas.openxmlformats.org/officeDocument/2006/relationships">
   <p:cSld>
@@ -6366,7 +7050,7 @@
             <a:avLst/>
           </a:prstGeom>
           <a:solidFill>
-            <a:srgbClr val="0E5233"/>
+            <a:srgbClr val="FFFFFF"/>
           </a:solidFill>
           <a:ln>
             <a:noFill/>
@@ -6403,8 +7087,8 @@
         </p:nvSpPr>
         <p:spPr>
           <a:xfrm>
-            <a:off x="914400" y="2194560"/>
-            <a:ext cx="10332720" cy="914400"/>
+            <a:off x="548640" y="320040"/>
+            <a:ext cx="868680" cy="731520"/>
           </a:xfrm>
           <a:prstGeom prst="rect">
             <a:avLst/>
@@ -6418,12 +7102,12 @@
           <a:lstStyle/>
           <a:p>
             <a:r>
-              <a:rPr sz="4400" b="1">
-                <a:solidFill>
-                  <a:srgbClr val="FFFFFF"/>
-                </a:solidFill>
-              </a:rPr>
-              <a:t>沧浪舟</a:t>
+              <a:rPr sz="4000" b="1">
+                <a:solidFill>
+                  <a:srgbClr val="1A7A4A"/>
+                </a:solidFill>
+              </a:rPr>
+              <a:t>06</a:t>
             </a:r>
           </a:p>
         </p:txBody>
@@ -6436,8 +7120,8 @@
         </p:nvSpPr>
         <p:spPr>
           <a:xfrm>
-            <a:off x="914400" y="3291840"/>
-            <a:ext cx="10332720" cy="548640"/>
+            <a:off x="1508760" y="475488"/>
+            <a:ext cx="10058400" cy="640080"/>
           </a:xfrm>
           <a:prstGeom prst="rect">
             <a:avLst/>
@@ -6451,26 +7135,70 @@
           <a:lstStyle/>
           <a:p>
             <a:r>
-              <a:rPr sz="1800" b="0">
-                <a:solidFill>
-                  <a:srgbClr val="CFE6D8"/>
-                </a:solidFill>
-              </a:rPr>
-              <a:t>个人参赛 · 2026 年 10 月</a:t>
-            </a:r>
-          </a:p>
-        </p:txBody>
-      </p:sp>
-      <p:sp>
-        <p:nvSpPr>
-          <p:cNvPr id="5" name="TextBox 4"/>
+              <a:rPr sz="2800" b="1">
+                <a:solidFill>
+                  <a:srgbClr val="0E5233"/>
+                </a:solidFill>
+              </a:rPr>
+              <a:t>不确定性写在前头（格点敏感性实测）</a:t>
+            </a:r>
+          </a:p>
+        </p:txBody>
+      </p:sp>
+      <p:sp>
+        <p:nvSpPr>
+          <p:cNvPr id="5" name="Rectangle 4"/>
+          <p:cNvSpPr/>
+          <p:nvPr/>
+        </p:nvSpPr>
+        <p:spPr>
+          <a:xfrm>
+            <a:off x="594360" y="1170432"/>
+            <a:ext cx="2011680" cy="54864"/>
+          </a:xfrm>
+          <a:prstGeom prst="rect">
+            <a:avLst/>
+          </a:prstGeom>
+          <a:solidFill>
+            <a:srgbClr val="1A7A4A"/>
+          </a:solidFill>
+          <a:ln>
+            <a:noFill/>
+          </a:ln>
+          <a:effectLst/>
+        </p:spPr>
+        <p:style>
+          <a:lnRef idx="1">
+            <a:schemeClr val="accent1"/>
+          </a:lnRef>
+          <a:fillRef idx="3">
+            <a:schemeClr val="accent1"/>
+          </a:fillRef>
+          <a:effectRef idx="2">
+            <a:schemeClr val="accent1"/>
+          </a:effectRef>
+          <a:fontRef idx="minor">
+            <a:schemeClr val="lt1"/>
+          </a:fontRef>
+        </p:style>
+        <p:txBody>
+          <a:bodyPr rtlCol="0" anchor="ctr"/>
+          <a:lstStyle/>
+          <a:p>
+            <a:pPr algn="ctr"/>
+          </a:p>
+        </p:txBody>
+      </p:sp>
+      <p:sp>
+        <p:nvSpPr>
+          <p:cNvPr id="6" name="TextBox 5"/>
           <p:cNvSpPr txBox="1"/>
           <p:nvPr/>
         </p:nvSpPr>
         <p:spPr>
           <a:xfrm>
-            <a:off x="914400" y="4206240"/>
-            <a:ext cx="10332720" cy="1097280"/>
+            <a:off x="640080" y="1600200"/>
+            <a:ext cx="10972800" cy="822960"/>
           </a:xfrm>
           <a:prstGeom prst="rect">
             <a:avLst/>
@@ -6484,36 +7212,26 @@
           <a:lstStyle/>
           <a:p>
             <a:r>
-              <a:rPr sz="2000" b="0">
-                <a:solidFill>
-                  <a:srgbClr val="FFFFFF"/>
-                </a:solidFill>
-              </a:rPr>
-              <a:t>把一个真实问题带来，让 AI 真正去解决它。</a:t>
-            </a:r>
-          </a:p>
-          <a:p>
-            <a:r>
-              <a:rPr sz="2000" b="0">
-                <a:solidFill>
-                  <a:srgbClr val="FFFFFF"/>
-                </a:solidFill>
-              </a:rPr>
-              <a:t>一个地方。一个气候问题。一个 AI 解决方案。</a:t>
-            </a:r>
-          </a:p>
-        </p:txBody>
-      </p:sp>
-      <p:sp>
-        <p:nvSpPr>
-          <p:cNvPr id="6" name="TextBox 5"/>
+              <a:rPr sz="1600" b="0">
+                <a:solidFill>
+                  <a:srgbClr val="1F2D27"/>
+                </a:solidFill>
+              </a:rPr>
+              <a:t>同一坐标取 4 个互不相同的格点：2022 年 122 天里有 54 天（44.3%）四类风险的最高等级不一致。格点再分析 ≠ 单园实测——这条实测写进材料，测试脚本已入库可复算。</a:t>
+            </a:r>
+          </a:p>
+        </p:txBody>
+      </p:sp>
+      <p:sp>
+        <p:nvSpPr>
+          <p:cNvPr id="7" name="TextBox 6"/>
           <p:cNvSpPr txBox="1"/>
           <p:nvPr/>
         </p:nvSpPr>
         <p:spPr>
           <a:xfrm>
-            <a:off x="914400" y="5760720"/>
-            <a:ext cx="10332720" cy="457200"/>
+            <a:off x="640080" y="2606040"/>
+            <a:ext cx="5303520" cy="457200"/>
           </a:xfrm>
           <a:prstGeom prst="rect">
             <a:avLst/>
@@ -6527,12 +7245,758 @@
           <a:lstStyle/>
           <a:p>
             <a:r>
-              <a:rPr sz="1300" b="0">
-                <a:solidFill>
-                  <a:srgbClr val="CFE6D8"/>
-                </a:solidFill>
-              </a:rPr>
-              <a:t>ai4climate.world ｜ pawnnwap.github.io/danju-zhihan ｜ deepseek.club/topic/5043</a:t>
+              <a:rPr sz="2000" b="1">
+                <a:solidFill>
+                  <a:srgbClr val="0E5233"/>
+                </a:solidFill>
+              </a:rPr>
+              <a:t>已知不确定性与对应处置</a:t>
+            </a:r>
+          </a:p>
+        </p:txBody>
+      </p:sp>
+      <p:sp>
+        <p:nvSpPr>
+          <p:cNvPr id="8" name="TextBox 7"/>
+          <p:cNvSpPr txBox="1"/>
+          <p:nvPr/>
+        </p:nvSpPr>
+        <p:spPr>
+          <a:xfrm>
+            <a:off x="640080" y="3108960"/>
+            <a:ext cx="5303520" cy="2377440"/>
+          </a:xfrm>
+          <a:prstGeom prst="rect">
+            <a:avLst/>
+          </a:prstGeom>
+          <a:noFill/>
+        </p:spPr>
+        <p:txBody>
+          <a:bodyPr wrap="square">
+            <a:spAutoFit/>
+          </a:bodyPr>
+          <a:lstStyle/>
+          <a:p>
+            <a:r>
+              <a:rPr sz="1500" b="0">
+                <a:solidFill>
+                  <a:srgbClr val="1F2D27"/>
+                </a:solidFill>
+              </a:rPr>
+              <a:t>●  ERA5-Land 约 9km 格点，与单园实测有偏差</a:t>
+            </a:r>
+          </a:p>
+          <a:p>
+            <a:r>
+              <a:rPr sz="1500" b="0">
+                <a:solidFill>
+                  <a:srgbClr val="1F2D27"/>
+                </a:solidFill>
+              </a:rPr>
+              <a:t>     → 试点逐园校准，判级标注格点口径</a:t>
+            </a:r>
+          </a:p>
+          <a:p>
+            <a:r>
+              <a:rPr sz="1500" b="0">
+                <a:solidFill>
+                  <a:srgbClr val="1F2D27"/>
+                </a:solidFill>
+              </a:rPr>
+              <a:t>●  7 天预报误差随天数增大</a:t>
+            </a:r>
+          </a:p>
+          <a:p>
+            <a:r>
+              <a:rPr sz="1500" b="0">
+                <a:solidFill>
+                  <a:srgbClr val="1F2D27"/>
+                </a:solidFill>
+              </a:rPr>
+              <a:t>     → 8 天外等级一律压为「关注」</a:t>
+            </a:r>
+          </a:p>
+          <a:p>
+            <a:r>
+              <a:rPr sz="1500" b="0">
+                <a:solidFill>
+                  <a:srgbClr val="1F2D27"/>
+                </a:solidFill>
+              </a:rPr>
+              <a:t>●  干旱阈值未与本地旱情对表</a:t>
+            </a:r>
+          </a:p>
+          <a:p>
+            <a:r>
+              <a:rPr sz="1500" b="0">
+                <a:solidFill>
+                  <a:srgbClr val="1F2D27"/>
+                </a:solidFill>
+              </a:rPr>
+              <a:t>     → 田间墒情对表列为试点必做记录项</a:t>
+            </a:r>
+          </a:p>
+          <a:p>
+            <a:r>
+              <a:rPr sz="1500" b="0">
+                <a:solidFill>
+                  <a:srgbClr val="1F2D27"/>
+                </a:solidFill>
+              </a:rPr>
+              <a:t>●  预报路径零回测</a:t>
+            </a:r>
+          </a:p>
+          <a:p>
+            <a:r>
+              <a:rPr sz="1500" b="0">
+                <a:solidFill>
+                  <a:srgbClr val="1F2D27"/>
+                </a:solidFill>
+              </a:rPr>
+              <a:t>     → 不宣称预报技巧，只做风险窗口提示</a:t>
+            </a:r>
+          </a:p>
+        </p:txBody>
+      </p:sp>
+      <p:sp>
+        <p:nvSpPr>
+          <p:cNvPr id="9" name="TextBox 8"/>
+          <p:cNvSpPr txBox="1"/>
+          <p:nvPr/>
+        </p:nvSpPr>
+        <p:spPr>
+          <a:xfrm>
+            <a:off x="6309360" y="3108960"/>
+            <a:ext cx="5303520" cy="2377440"/>
+          </a:xfrm>
+          <a:prstGeom prst="rect">
+            <a:avLst/>
+          </a:prstGeom>
+          <a:noFill/>
+        </p:spPr>
+        <p:txBody>
+          <a:bodyPr wrap="square">
+            <a:spAutoFit/>
+          </a:bodyPr>
+          <a:lstStyle/>
+          <a:p>
+            <a:r>
+              <a:rPr sz="1500" b="0">
+                <a:solidFill>
+                  <a:srgbClr val="1F2D27"/>
+                </a:solidFill>
+              </a:rPr>
+              <a:t>已如实标注、绝不宣称：</a:t>
+            </a:r>
+          </a:p>
+          <a:p>
+            <a:r>
+              <a:rPr sz="1500" b="0">
+                <a:solidFill>
+                  <a:srgbClr val="1F2D27"/>
+                </a:solidFill>
+              </a:rPr>
+              <a:t>●  2022 回测是单事件、单格点，不外推为普遍准确率</a:t>
+            </a:r>
+          </a:p>
+          <a:p>
+            <a:r>
+              <a:rPr sz="1500" b="0">
+                <a:solidFill>
+                  <a:srgbClr val="1F2D27"/>
+                </a:solidFill>
+              </a:rPr>
+              <a:t>●  干旱「重」级判级能力是命名承诺最弱环</a:t>
+            </a:r>
+          </a:p>
+          <a:p>
+            <a:r>
+              <a:rPr sz="1500" b="0">
+                <a:solidFill>
+                  <a:srgbClr val="1F2D27"/>
+                </a:solidFill>
+              </a:rPr>
+              <a:t>●  无用户访谈、无减损/增收效果数据（试点回答）</a:t>
+            </a:r>
+          </a:p>
+          <a:p>
+            <a:r>
+              <a:rPr sz="1500" b="0">
+                <a:solidFill>
+                  <a:srgbClr val="1F2D27"/>
+                </a:solidFill>
+              </a:rPr>
+              <a:t>●  每条判级印规则版本号 + 定标/留出段，</a:t>
+            </a:r>
+          </a:p>
+          <a:p>
+            <a:r>
+              <a:rPr sz="1500" b="0">
+                <a:solidFill>
+                  <a:srgbClr val="1F2D27"/>
+                </a:solidFill>
+              </a:rPr>
+              <a:t>     截图可追溯到具体规则版本</a:t>
+            </a:r>
+          </a:p>
+        </p:txBody>
+      </p:sp>
+      <p:sp>
+        <p:nvSpPr>
+          <p:cNvPr id="10" name="TextBox 9"/>
+          <p:cNvSpPr txBox="1"/>
+          <p:nvPr/>
+        </p:nvSpPr>
+        <p:spPr>
+          <a:xfrm>
+            <a:off x="640080" y="5760720"/>
+            <a:ext cx="10972800" cy="548640"/>
+          </a:xfrm>
+          <a:prstGeom prst="rect">
+            <a:avLst/>
+          </a:prstGeom>
+          <a:noFill/>
+        </p:spPr>
+        <p:txBody>
+          <a:bodyPr wrap="square">
+            <a:spAutoFit/>
+          </a:bodyPr>
+          <a:lstStyle/>
+          <a:p>
+            <a:r>
+              <a:rPr sz="1400" b="0">
+                <a:solidFill>
+                  <a:srgbClr val="C0392B"/>
+                </a:solidFill>
+              </a:rPr>
+              <a:t>处置原则：外部性动作一律 fail-closed（未确认不推送）；不在现场下指令；等级仅辅助安排农事。</a:t>
+            </a:r>
+          </a:p>
+        </p:txBody>
+      </p:sp>
+    </p:spTree>
+  </p:cSld>
+  <p:clrMapOvr>
+    <a:masterClrMapping/>
+  </p:clrMapOvr>
+</p:sld>
+</file>
+
+<file path=ppt/slides/slide9.xml><?xml version="1.0" encoding="utf-8"?>
+<p:sld xmlns:a="http://schemas.openxmlformats.org/drawingml/2006/main" xmlns:p="http://schemas.openxmlformats.org/presentationml/2006/main" xmlns:r="http://schemas.openxmlformats.org/officeDocument/2006/relationships">
+  <p:cSld>
+    <p:spTree>
+      <p:nvGrpSpPr>
+        <p:cNvPr id="1" name=""/>
+        <p:cNvGrpSpPr/>
+        <p:nvPr/>
+      </p:nvGrpSpPr>
+      <p:grpSpPr/>
+      <p:sp>
+        <p:nvSpPr>
+          <p:cNvPr id="2" name="Rectangle 1"/>
+          <p:cNvSpPr/>
+          <p:nvPr/>
+        </p:nvSpPr>
+        <p:spPr>
+          <a:xfrm>
+            <a:off x="0" y="0"/>
+            <a:ext cx="12191695" cy="6858000"/>
+          </a:xfrm>
+          <a:prstGeom prst="rect">
+            <a:avLst/>
+          </a:prstGeom>
+          <a:solidFill>
+            <a:srgbClr val="FFFFFF"/>
+          </a:solidFill>
+          <a:ln>
+            <a:noFill/>
+          </a:ln>
+          <a:effectLst/>
+        </p:spPr>
+        <p:style>
+          <a:lnRef idx="1">
+            <a:schemeClr val="accent1"/>
+          </a:lnRef>
+          <a:fillRef idx="3">
+            <a:schemeClr val="accent1"/>
+          </a:fillRef>
+          <a:effectRef idx="2">
+            <a:schemeClr val="accent1"/>
+          </a:effectRef>
+          <a:fontRef idx="minor">
+            <a:schemeClr val="lt1"/>
+          </a:fontRef>
+        </p:style>
+        <p:txBody>
+          <a:bodyPr rtlCol="0" anchor="ctr"/>
+          <a:lstStyle/>
+          <a:p>
+            <a:pPr algn="ctr"/>
+          </a:p>
+        </p:txBody>
+      </p:sp>
+      <p:sp>
+        <p:nvSpPr>
+          <p:cNvPr id="3" name="TextBox 2"/>
+          <p:cNvSpPr txBox="1"/>
+          <p:nvPr/>
+        </p:nvSpPr>
+        <p:spPr>
+          <a:xfrm>
+            <a:off x="548640" y="320040"/>
+            <a:ext cx="868680" cy="731520"/>
+          </a:xfrm>
+          <a:prstGeom prst="rect">
+            <a:avLst/>
+          </a:prstGeom>
+          <a:noFill/>
+        </p:spPr>
+        <p:txBody>
+          <a:bodyPr wrap="square">
+            <a:spAutoFit/>
+          </a:bodyPr>
+          <a:lstStyle/>
+          <a:p>
+            <a:r>
+              <a:rPr sz="4000" b="1">
+                <a:solidFill>
+                  <a:srgbClr val="1A7A4A"/>
+                </a:solidFill>
+              </a:rPr>
+              <a:t>07</a:t>
+            </a:r>
+          </a:p>
+        </p:txBody>
+      </p:sp>
+      <p:sp>
+        <p:nvSpPr>
+          <p:cNvPr id="4" name="TextBox 3"/>
+          <p:cNvSpPr txBox="1"/>
+          <p:nvPr/>
+        </p:nvSpPr>
+        <p:spPr>
+          <a:xfrm>
+            <a:off x="1508760" y="475488"/>
+            <a:ext cx="10058400" cy="640080"/>
+          </a:xfrm>
+          <a:prstGeom prst="rect">
+            <a:avLst/>
+          </a:prstGeom>
+          <a:noFill/>
+        </p:spPr>
+        <p:txBody>
+          <a:bodyPr wrap="square">
+            <a:spAutoFit/>
+          </a:bodyPr>
+          <a:lstStyle/>
+          <a:p>
+            <a:r>
+              <a:rPr sz="2800" b="1">
+                <a:solidFill>
+                  <a:srgbClr val="0E5233"/>
+                </a:solidFill>
+              </a:rPr>
+              <a:t>传播与公众采用：把专业判级转译成能贴在墙上的话</a:t>
+            </a:r>
+          </a:p>
+        </p:txBody>
+      </p:sp>
+      <p:sp>
+        <p:nvSpPr>
+          <p:cNvPr id="5" name="Rectangle 4"/>
+          <p:cNvSpPr/>
+          <p:nvPr/>
+        </p:nvSpPr>
+        <p:spPr>
+          <a:xfrm>
+            <a:off x="594360" y="1170432"/>
+            <a:ext cx="2011680" cy="54864"/>
+          </a:xfrm>
+          <a:prstGeom prst="rect">
+            <a:avLst/>
+          </a:prstGeom>
+          <a:solidFill>
+            <a:srgbClr val="1A7A4A"/>
+          </a:solidFill>
+          <a:ln>
+            <a:noFill/>
+          </a:ln>
+          <a:effectLst/>
+        </p:spPr>
+        <p:style>
+          <a:lnRef idx="1">
+            <a:schemeClr val="accent1"/>
+          </a:lnRef>
+          <a:fillRef idx="3">
+            <a:schemeClr val="accent1"/>
+          </a:fillRef>
+          <a:effectRef idx="2">
+            <a:schemeClr val="accent1"/>
+          </a:effectRef>
+          <a:fontRef idx="minor">
+            <a:schemeClr val="lt1"/>
+          </a:fontRef>
+        </p:style>
+        <p:txBody>
+          <a:bodyPr rtlCol="0" anchor="ctr"/>
+          <a:lstStyle/>
+          <a:p>
+            <a:pPr algn="ctr"/>
+          </a:p>
+        </p:txBody>
+      </p:sp>
+      <p:pic>
+        <p:nvPicPr>
+          <p:cNvPr id="6" name="Picture 5" descr="dashboard.png"/>
+          <p:cNvPicPr>
+            <a:picLocks noChangeAspect="1"/>
+          </p:cNvPicPr>
+          <p:nvPr/>
+        </p:nvPicPr>
+        <p:blipFill>
+          <a:blip r:embed="rId2"/>
+          <a:stretch>
+            <a:fillRect/>
+          </a:stretch>
+        </p:blipFill>
+        <p:spPr>
+          <a:xfrm>
+            <a:off x="640080" y="1645920"/>
+            <a:ext cx="3310128" cy="1865376"/>
+          </a:xfrm>
+          <a:prstGeom prst="rect">
+            <a:avLst/>
+          </a:prstGeom>
+          <a:ln w="12700">
+            <a:solidFill>
+              <a:srgbClr val="1A7A4A"/>
+            </a:solidFill>
+          </a:ln>
+        </p:spPr>
+      </p:pic>
+      <p:sp>
+        <p:nvSpPr>
+          <p:cNvPr id="7" name="TextBox 6"/>
+          <p:cNvSpPr txBox="1"/>
+          <p:nvPr/>
+        </p:nvSpPr>
+        <p:spPr>
+          <a:xfrm>
+            <a:off x="640080" y="3566160"/>
+            <a:ext cx="3310128" cy="457200"/>
+          </a:xfrm>
+          <a:prstGeom prst="rect">
+            <a:avLst/>
+          </a:prstGeom>
+          <a:noFill/>
+        </p:spPr>
+        <p:txBody>
+          <a:bodyPr wrap="square">
+            <a:spAutoFit/>
+          </a:bodyPr>
+          <a:lstStyle/>
+          <a:p>
+            <a:r>
+              <a:rPr sz="1200" b="0">
+                <a:solidFill>
+                  <a:srgbClr val="6B7A72"/>
+                </a:solidFill>
+              </a:rPr>
+              <a:t>① 看板：四类风险一屏读完</a:t>
+            </a:r>
+          </a:p>
+        </p:txBody>
+      </p:sp>
+      <p:pic>
+        <p:nvPicPr>
+          <p:cNvPr id="8" name="Picture 7" descr="calendar.png"/>
+          <p:cNvPicPr>
+            <a:picLocks noChangeAspect="1"/>
+          </p:cNvPicPr>
+          <p:nvPr/>
+        </p:nvPicPr>
+        <p:blipFill>
+          <a:blip r:embed="rId3"/>
+          <a:stretch>
+            <a:fillRect/>
+          </a:stretch>
+        </p:blipFill>
+        <p:spPr>
+          <a:xfrm>
+            <a:off x="4443984" y="1645920"/>
+            <a:ext cx="3310128" cy="1865376"/>
+          </a:xfrm>
+          <a:prstGeom prst="rect">
+            <a:avLst/>
+          </a:prstGeom>
+          <a:ln w="12700">
+            <a:solidFill>
+              <a:srgbClr val="1A7A4A"/>
+            </a:solidFill>
+          </a:ln>
+        </p:spPr>
+      </p:pic>
+      <p:sp>
+        <p:nvSpPr>
+          <p:cNvPr id="9" name="TextBox 8"/>
+          <p:cNvSpPr txBox="1"/>
+          <p:nvPr/>
+        </p:nvSpPr>
+        <p:spPr>
+          <a:xfrm>
+            <a:off x="4443984" y="3566160"/>
+            <a:ext cx="3310128" cy="457200"/>
+          </a:xfrm>
+          <a:prstGeom prst="rect">
+            <a:avLst/>
+          </a:prstGeom>
+          <a:noFill/>
+        </p:spPr>
+        <p:txBody>
+          <a:bodyPr wrap="square">
+            <a:spAutoFit/>
+          </a:bodyPr>
+          <a:lstStyle/>
+          <a:p>
+            <a:r>
+              <a:rPr sz="1200" b="0">
+                <a:solidFill>
+                  <a:srgbClr val="6B7A72"/>
+                </a:solidFill>
+              </a:rPr>
+              <a:t>② 97 天日历：红橙黄蓝一格一天</a:t>
+            </a:r>
+          </a:p>
+        </p:txBody>
+      </p:sp>
+      <p:pic>
+        <p:nvPicPr>
+          <p:cNvPr id="10" name="Picture 9" descr="advice-export.png"/>
+          <p:cNvPicPr>
+            <a:picLocks noChangeAspect="1"/>
+          </p:cNvPicPr>
+          <p:nvPr/>
+        </p:nvPicPr>
+        <p:blipFill>
+          <a:blip r:embed="rId4"/>
+          <a:stretch>
+            <a:fillRect/>
+          </a:stretch>
+        </p:blipFill>
+        <p:spPr>
+          <a:xfrm>
+            <a:off x="8247888" y="1645920"/>
+            <a:ext cx="3310128" cy="1865376"/>
+          </a:xfrm>
+          <a:prstGeom prst="rect">
+            <a:avLst/>
+          </a:prstGeom>
+          <a:ln w="12700">
+            <a:solidFill>
+              <a:srgbClr val="1A7A4A"/>
+            </a:solidFill>
+          </a:ln>
+        </p:spPr>
+      </p:pic>
+      <p:sp>
+        <p:nvSpPr>
+          <p:cNvPr id="11" name="TextBox 10"/>
+          <p:cNvSpPr txBox="1"/>
+          <p:nvPr/>
+        </p:nvSpPr>
+        <p:spPr>
+          <a:xfrm>
+            <a:off x="8247888" y="3566160"/>
+            <a:ext cx="3310128" cy="457200"/>
+          </a:xfrm>
+          <a:prstGeom prst="rect">
+            <a:avLst/>
+          </a:prstGeom>
+          <a:noFill/>
+        </p:spPr>
+        <p:txBody>
+          <a:bodyPr wrap="square">
+            <a:spAutoFit/>
+          </a:bodyPr>
+          <a:lstStyle/>
+          <a:p>
+            <a:r>
+              <a:rPr sz="1200" b="0">
+                <a:solidFill>
+                  <a:srgbClr val="6B7A72"/>
+                </a:solidFill>
+              </a:rPr>
+              <a:t>③ 建议报告：可打印张贴到合作社公告栏</a:t>
+            </a:r>
+          </a:p>
+        </p:txBody>
+      </p:sp>
+      <p:sp>
+        <p:nvSpPr>
+          <p:cNvPr id="12" name="TextBox 11"/>
+          <p:cNvSpPr txBox="1"/>
+          <p:nvPr/>
+        </p:nvSpPr>
+        <p:spPr>
+          <a:xfrm>
+            <a:off x="640080" y="4114800"/>
+            <a:ext cx="5303520" cy="457200"/>
+          </a:xfrm>
+          <a:prstGeom prst="rect">
+            <a:avLst/>
+          </a:prstGeom>
+          <a:noFill/>
+        </p:spPr>
+        <p:txBody>
+          <a:bodyPr wrap="square">
+            <a:spAutoFit/>
+          </a:bodyPr>
+          <a:lstStyle/>
+          <a:p>
+            <a:r>
+              <a:rPr sz="2000" b="1">
+                <a:solidFill>
+                  <a:srgbClr val="0E5233"/>
+                </a:solidFill>
+              </a:rPr>
+              <a:t>传播链路（已在线上跑通）</a:t>
+            </a:r>
+          </a:p>
+        </p:txBody>
+      </p:sp>
+      <p:sp>
+        <p:nvSpPr>
+          <p:cNvPr id="13" name="TextBox 12"/>
+          <p:cNvSpPr txBox="1"/>
+          <p:nvPr/>
+        </p:nvSpPr>
+        <p:spPr>
+          <a:xfrm>
+            <a:off x="640080" y="4617720"/>
+            <a:ext cx="5303520" cy="1554480"/>
+          </a:xfrm>
+          <a:prstGeom prst="rect">
+            <a:avLst/>
+          </a:prstGeom>
+          <a:noFill/>
+        </p:spPr>
+        <p:txBody>
+          <a:bodyPr wrap="square">
+            <a:spAutoFit/>
+          </a:bodyPr>
+          <a:lstStyle/>
+          <a:p>
+            <a:r>
+              <a:rPr sz="1500" b="0">
+                <a:solidFill>
+                  <a:srgbClr val="1F2D27"/>
+                </a:solidFill>
+              </a:rPr>
+              <a:t>●  复杂气候信息 → 四级颜色 + 一句话触发依据</a:t>
+            </a:r>
+          </a:p>
+          <a:p>
+            <a:r>
+              <a:rPr sz="1500" b="0">
+                <a:solidFill>
+                  <a:srgbClr val="1F2D27"/>
+                </a:solidFill>
+              </a:rPr>
+              <a:t>●  报告/CSV 页面本地生成，不经过服务端</a:t>
+            </a:r>
+          </a:p>
+          <a:p>
+            <a:r>
+              <a:rPr sz="1500" b="0">
+                <a:solidFill>
+                  <a:srgbClr val="1F2D27"/>
+                </a:solidFill>
+              </a:rPr>
+              <a:t>●  竖排手机版式，农技员微信群直接转发</a:t>
+            </a:r>
+          </a:p>
+          <a:p>
+            <a:r>
+              <a:rPr sz="1500" b="0">
+                <a:solidFill>
+                  <a:srgbClr val="1F2D27"/>
+                </a:solidFill>
+              </a:rPr>
+              <a:t>●  小农户经节点间接受益：报告打印张贴即可</a:t>
+            </a:r>
+          </a:p>
+        </p:txBody>
+      </p:sp>
+      <p:sp>
+        <p:nvSpPr>
+          <p:cNvPr id="14" name="TextBox 13"/>
+          <p:cNvSpPr txBox="1"/>
+          <p:nvPr/>
+        </p:nvSpPr>
+        <p:spPr>
+          <a:xfrm>
+            <a:off x="6309360" y="4617720"/>
+            <a:ext cx="5303520" cy="1554480"/>
+          </a:xfrm>
+          <a:prstGeom prst="rect">
+            <a:avLst/>
+          </a:prstGeom>
+          <a:noFill/>
+        </p:spPr>
+        <p:txBody>
+          <a:bodyPr wrap="square">
+            <a:spAutoFit/>
+          </a:bodyPr>
+          <a:lstStyle/>
+          <a:p>
+            <a:r>
+              <a:rPr sz="1500" b="0">
+                <a:solidFill>
+                  <a:srgbClr val="1F2D27"/>
+                </a:solidFill>
+              </a:rPr>
+              <a:t>公众可验证性：</a:t>
+            </a:r>
+          </a:p>
+          <a:p>
+            <a:r>
+              <a:rPr sz="1500" b="0">
+                <a:solidFill>
+                  <a:srgbClr val="1F2D27"/>
+                </a:solidFill>
+              </a:rPr>
+              <a:t>●  三个历史回放场景现场就能点开</a:t>
+            </a:r>
+          </a:p>
+          <a:p>
+            <a:r>
+              <a:rPr sz="1500" b="0">
+                <a:solidFill>
+                  <a:srgbClr val="1F2D27"/>
+                </a:solidFill>
+              </a:rPr>
+              <a:t>●  输入序列冻结 + 代码开源，任何人离线复算</a:t>
+            </a:r>
+          </a:p>
+          <a:p>
+            <a:r>
+              <a:rPr sz="1500" b="0">
+                <a:solidFill>
+                  <a:srgbClr val="1F2D27"/>
+                </a:solidFill>
+              </a:rPr>
+              <a:t>●  175 秒演示片 + 开源仓库 + 作品帖三通道</a:t>
+            </a:r>
+          </a:p>
+          <a:p>
+            <a:r>
+              <a:rPr sz="1500" b="0">
+                <a:solidFill>
+                  <a:srgbClr val="1F2D27"/>
+                </a:solidFill>
+              </a:rPr>
+              <a:t>●  页面页脚印判级口径串，可追溯到规则版本</a:t>
             </a:r>
           </a:p>
         </p:txBody>
